--- a/docs/presentation/sih2026-idea-agnidrishti.pptx
+++ b/docs/presentation/sih2026-idea-agnidrishti.pptx
@@ -629,7 +629,7 @@
           </a:p>
           <a:p>
             <a:r>
-              <a:t>10-second pitch: static limits pass an in-spec part even when it is abnormal for its lot or drifting. AgniDrishti flags it at hour 24, forecasts 168 h with a calibrated range, and sends any doubt to an engineer with the rule that fired — never a silent PASS.</a:t>
+              <a:t>10-second pitch: static limits pass an in-spec part even when it is abnormal for its lot or drifting — the PS's 'latent defect'. AgniDrishti flags it at hour 24 and sends doubtful parts to an engineer; every decision, PASS included, shows the rule that fired, and bad or missing data is never PASSed.</a:t>
             </a:r>
           </a:p>
           <a:p>
@@ -724,27 +724,27 @@
           <a:lstStyle/>
           <a:p>
             <a:r>
-              <a:t>ONE MESSAGE: in spec is not the same as healthy. The chart is one real row from the frozen pipeline on held-out SYNTHETIC test lots (run artifacts/metrics/E1-E6_test/20260926-144448_c8ca99b): SYN-L026-C0010 Iddq, 12.34 uA at 24 h (limit 30 uA), drift 42.7 robust sigma from its lot -&gt; REJECT (R2). Its 96 h and 168 h values (22.3, 32.0 uA) were revealed only after the decision, for evaluation.</a:t>
-            </a:r>
-          </a:p>
-          <a:p>
-            <a:r>
-              <a:t>Same pattern as the PS's own illustration (lot 10 uA, part 45 uA, limit 50 uA).</a:t>
-            </a:r>
-          </a:p>
-          <a:p>
-            <a:r>
-              <a:t>Honest detail: the 168 h point forecast (12.45 uA) under-predicted this part; the catch came from the lot-relative drift and the safety-slope rule.</a:t>
-            </a:r>
-          </a:p>
-          <a:p>
-            <a:r>
-              <a:t>Tiles: recall on the primary proxy label (drift &gt; 15 % of the 0 h value by 168 h, or 168 h outside the limit), 30 positive rows, REVIEW counted as flagged. E1 0.133, E2 0.133, E3 0.667, E6 0.800 at 10.4 % review. Rates are imprecise with 30 positives.</a:t>
-            </a:r>
-          </a:p>
-          <a:p>
-            <a:r>
-              <a:t>DPAT is our Module A baseline, not our invention: what we add is lot-relative drift at 24 h, a calibrated 168 h range, and a REVIEW state.</a:t>
+              <a:t>ONE MESSAGE: in spec is not the same as healthy.</a:t>
+            </a:r>
+          </a:p>
+          <a:p>
+            <a:r>
+              <a:t>Chart: one real row of the frozen pipeline on held-out SYNTHETIC test lots (artifacts/metrics/E1-E6_test/20260926-144448_c8ca99b): SYN-L026-C0010 Iddq, 12.34 uA at 24 h (limit 30 uA). Drift 0-24 h 3.38 uA vs the lot's median drift 0.116 uA (29x; 42.7 robust sigma) -&gt; REJECT, rules R2;R3;R5. 96 h and 168 h values (22.3, 32.0 uA) were revealed only after the decision, for evaluation.</a:t>
+            </a:r>
+          </a:p>
+          <a:p>
+            <a:r>
+              <a:t>R2 needs both the point and the optimistic end of the range above the safety slope 0.0080 uA/h (15 % of V0 / 168 h): optimistic (12.14 - 8.955)/168 = 0.0190 uA/h = 2.4x; point 0.0208 = 2.6x. The forecast under-predicted the size.</a:t>
+            </a:r>
+          </a:p>
+          <a:p>
+            <a:r>
+              <a:t>Tiles: recall on the primary proxy label (drift &gt; 15 % of V0 by 168 h, or 168 h outside the limit), 30 positive part-parameters (one part x one parameter), REVIEW counted as flagged. E6 recall 0.80, 95 % Wilson CI 0.63-0.91. 11 % = 247 REVIEW + 14 REJECT of 2,368.</a:t>
+            </a:r>
+          </a:p>
+          <a:p>
+            <a:r>
+              <a:t>The evidence card for this part is on slide 4.</a:t>
             </a:r>
           </a:p>
         </p:txBody>
@@ -858,27 +858,37 @@
           <a:lstStyle/>
           <a:p>
             <a:r>
-              <a:t>ONE MESSAGE: a simple, layered pipeline where every layer had to earn its place in a recorded ablation.</a:t>
-            </a:r>
-          </a:p>
-          <a:p>
-            <a:r>
-              <a:t>Runs: test artifacts/metrics/E1-E6_test/20260926-144448_c8ca99b (frozen specs from validation run 20260926-144425_c8ca99b); Module B MAE from the validation lots (ablation-plan section 3). Label: primary proxy label, Delta_allow 0.15 relative (ADR-002/004). Precision at E6 is 0.092 (FPR 0.101): the cost of high recall is a 10.4 % review queue.</a:t>
-            </a:r>
-          </a:p>
-          <a:p>
-            <a:r>
-              <a:t>Predictors compared (simplest first): persistence, linear extrapolation, population increment, linear regression; population increment won on validation MAE.</a:t>
-            </a:r>
-          </a:p>
-          <a:p>
-            <a:r>
-              <a:t>Interval: split-conformal, target 90 % marginal coverage; per-lot coverage 0.668-0.980 on validation (lots break exchangeability). Not a failure probability.</a:t>
-            </a:r>
-          </a:p>
-          <a:p>
-            <a:r>
-              <a:t>MAD = 0 / small lots: quality gate flags the lot (min 20 parts) and a scale floor applies -&gt; REVIEW, never PASS.</a:t>
+              <a:t>ONE MESSAGE: each PS metric answered at the top; below it, a simple layered pipeline in which each layer's contribution was measured, including the ones that did not help.</a:t>
+            </a:r>
+          </a:p>
+          <a:p>
+            <a:r>
+              <a:t>Runs: test artifacts/metrics/E1-E6_test/20260926-144448_c8ca99b (frozen specs from validation run 20260926-144425_c8ca99b). MAE figures are on validation lots (ablation-plan section 3). Label: primary proxy label, Delta_allow 0.15 relative (ADR-002/004).</a:t>
+            </a:r>
+          </a:p>
+          <a:p>
+            <a:r>
+              <a:t>The PS names three evaluation metrics (Anomaly Detection Score, Drift Prediction Accuracy = MAE, Explainability) but gives no formula for the score; we count REVIEW + REJECT as flagged and report recall at a stated review share.</a:t>
+            </a:r>
+          </a:p>
+          <a:p>
+            <a:r>
+              <a:t>Why E6 rather than E3: E3 precision 0.213 at 3.5 % REVIEW; E6 0.092 at 10.4 %. The PS treats a miss as costlier than a review, so E6 is the recall-first point (+4 catches for about 165 more reviews). The review threshold is re-chosen per site fit to meet the configured target recall.</a:t>
+            </a:r>
+          </a:p>
+          <a:p>
+            <a:r>
+              <a:t>Test coverage of the 90 % range 0.887; per-lot 0.668-0.980 on validation. Not a failure probability.</a:t>
+            </a:r>
+          </a:p>
+          <a:p>
+            <a:r>
+              <a:t>Module B model choice: persistence (V168 = V24), linear extrapolation, population increment (V24 + median training-lot 24-&gt;168 h increase) and least-squares linear regression on (V0, V24) were compared; validation MAE Iddq 0.338 / 1.174 / 0.297 / 0.408 uA. The PS asks for a regression model; ours was tried and lost to the simpler learned increment, so the simpler one is used.</a:t>
+            </a:r>
+          </a:p>
+          <a:p>
+            <a:r>
+              <a:t>Why no LSTM: 2-4 readings per part; sequence models add opacity, not accuracy.</a:t>
             </a:r>
           </a:p>
         </p:txBody>
@@ -992,32 +1002,32 @@
           <a:lstStyle/>
           <a:p>
             <a:r>
-              <a:t>ONE MESSAGE: every known risk has a concrete mitigation, and the system is already built and verifiable.</a:t>
-            </a:r>
-          </a:p>
-          <a:p>
-            <a:r>
-              <a:t>[FACT] No official dataset is published for PS 26170 (verified 2026-09-26). Evaluators hold hidden ground truth.</a:t>
-            </a:r>
-          </a:p>
-          <a:p>
-            <a:r>
-              <a:t>Synthetic data is ours, always labelled SYNTHETIC, never presented as ISRO data. NASA PCoE data: planned methodology check, not yet run.</a:t>
-            </a:r>
-          </a:p>
-          <a:p>
-            <a:r>
-              <a:t>Escapes and false rejects are from the final test run (ablation-plan section 5, F5/F6). The v1 test split is spent: rule changes need new pre-registered data.</a:t>
-            </a:r>
-          </a:p>
-          <a:p>
-            <a:r>
-              <a:t>Timing and replay: service run 20260929-035534_1f5d29a on the frozen pipeline; decisions identical to the recorded test run (2107 / 247 / 14).</a:t>
-            </a:r>
-          </a:p>
-          <a:p>
-            <a:r>
-              <a:t>Held-out families: written by the team outside the repository; only the SHA-256 commitment is in the repo (synthetic-data-design section 7). Not yet opened.</a:t>
+              <a:t>ONE MESSAGE: every known risk is stated at its true status, and the product output is shown.</a:t>
+            </a:r>
+          </a:p>
+          <a:p>
+            <a:r>
+              <a:t>Data flow in a facility: QA exports the 24 h readings as CSV -&gt; upload in the web UI or CLI -&gt; ranked REVIEW queue with evidence cards.</a:t>
+            </a:r>
+          </a:p>
+          <a:p>
+            <a:r>
+              <a:t>Escapes and false rejects: final test run, ablation-plan section 5 F5/F6; REJECT 14 = 8 true + 6 false (primary label); 6 / 2,338 negatives = 0.3 %.</a:t>
+            </a:r>
+          </a:p>
+          <a:p>
+            <a:r>
+              <a:t>Held-out families: written by the team outside the repository; only the SHA-256 commitment is in the repo. Not yet opened; opening date is a team decision.</a:t>
+            </a:r>
+          </a:p>
+          <a:p>
+            <a:r>
+              <a:t>Scale: service runs on the frozen pipeline, 3 runs each, median: 2,368 part-parameters 0.35 s; 23,680 (10x) 2.6 s; 118,400 (50x, 500 lots) 14.2 s. Test lots copied with new lot IDs; decisions scale exactly. One PC, 2026-09-29.</a:t>
+            </a:r>
+          </a:p>
+          <a:p>
+            <a:r>
+              <a:t>Replay: GET /api/runs/&lt;id&gt;/replay returned identical: true for the test-lot run (20260929-035534_1f5d29a).</a:t>
             </a:r>
           </a:p>
         </p:txBody>
@@ -1195,17 +1205,22 @@
           </a:p>
           <a:p>
             <a:r>
-              <a:t>Decision shares and 24/30 vs 4/30 come from the held-out synthetic test run (c8ca99b). They are not ISRO results.</a:t>
-            </a:r>
-          </a:p>
-          <a:p>
-            <a:r>
-              <a:t>144 / 168 chamber-hours is arithmetic from the PS timeline (168 - 24 = 144); do not multiply it by a guessed reject rate.</a:t>
-            </a:r>
-          </a:p>
-          <a:p>
-            <a:r>
-              <a:t>The burn-in procedure itself is not changed; AgniDrishti adds an earlier, advisory view with a human decision.</a:t>
+              <a:t>Focus: 261 flagged part-parameters (247 REVIEW + 14 REJECT) = 11.0 % of 2,368 hold 24 of 30 positives: 9.2 % in the queue vs 1.27 % base rate, 7.3x. Synthetic held-out test run c8ca99b; not an ISRO result.</a:t>
+            </a:r>
+          </a:p>
+          <a:p>
+            <a:r>
+              <a:t>Phase 2 gate: the 90 % range must reach its target coverage on at least 90 % of ISRO lots before the forecast is used there.</a:t>
+            </a:r>
+          </a:p>
+          <a:p>
+            <a:r>
+              <a:t>Chamber time: 168 - 24 = 144 h only if a rejected part's slot can be reloaded; burn-in usually runs as batches. Not measured.</a:t>
+            </a:r>
+          </a:p>
+          <a:p>
+            <a:r>
+              <a:t>All decisions are advisory: the pipeline decision is recorded, the engineer's decision is logged beside it and never overwrites it.</a:t>
             </a:r>
           </a:p>
         </p:txBody>
@@ -1383,12 +1398,12 @@
           </a:p>
           <a:p>
             <a:r>
-              <a:t>AEC-Q001 and ESCC informed the design; no compliance is claimed. NASA PCoE data is external public data, planned for a methodology check (R-01..R-04 not yet executed).</a:t>
-            </a:r>
-          </a:p>
-          <a:p>
-            <a:r>
-              <a:t>The repository must be public before upload, otherwise remove the link.</a:t>
+              <a:t>DOIs resolved via doi.org on 2026-09-29; ESREL 2023 title and authors checked against the proceedings page. AEC-Q001 and ESCC informed the design; no compliance is claimed. NASA PCoE data is external public data, planned for a methodology check (R-01..R-04 not yet executed).</a:t>
+            </a:r>
+          </a:p>
+          <a:p>
+            <a:r>
+              <a:t>Pre-registration: commit 9f52521 (E1-E6 values) precedes the first detector commit 31da148 (same evening); the frozen specs were applied once to the test lots (run 20260926-144448_c8ca99b). Held-out commitment 8ed3789 precedes the generator.</a:t>
             </a:r>
           </a:p>
         </p:txBody>
@@ -5769,7 +5784,7 @@
         <p:spPr>
           <a:xfrm>
             <a:off x="331286" y="2076450"/>
-            <a:ext cx="6400800" cy="4582729"/>
+            <a:ext cx="6903720" cy="4582729"/>
           </a:xfrm>
           <a:prstGeom prst="rect">
             <a:avLst/>
@@ -5806,13 +5821,70 @@
               <a:buNone/>
             </a:pPr>
             <a:r>
-              <a:rPr lang="en-US" sz="1600" b="1" i="1">
+              <a:rPr lang="en-US" sz="2000" b="1" i="0">
                 <a:solidFill>
                   <a:srgbClr val="1F3864"/>
                 </a:solidFill>
                 <a:latin typeface="Arial"/>
               </a:rPr>
               <a:t>Catch the drifting in-spec part at hour 24, not 168.</a:t>
+            </a:r>
+          </a:p>
+          <a:p>
+            <a:pPr algn="l">
+              <a:lnSpc>
+                <a:spcPct val="100000"/>
+              </a:lnSpc>
+              <a:spcBef>
+                <a:spcPts val="400"/>
+              </a:spcBef>
+              <a:spcAft>
+                <a:spcPts val="600"/>
+              </a:spcAft>
+              <a:buNone/>
+            </a:pPr>
+            <a:r>
+              <a:rPr lang="en-US" sz="1400" b="0" i="0">
+                <a:solidFill>
+                  <a:srgbClr val="1F3864"/>
+                </a:solidFill>
+                <a:latin typeface="Arial"/>
+              </a:rPr>
+              <a:t>Decision support for ISRO burn-in QA: at the 24 h reading, each part</a:t>
+            </a:r>
+            <a:br>
+              <a:rPr lang="en-US" sz="1400" b="0" i="0">
+                <a:solidFill>
+                  <a:srgbClr val="1F3864"/>
+                </a:solidFill>
+                <a:latin typeface="Arial"/>
+              </a:rPr>
+            </a:br>
+            <a:r>
+              <a:rPr lang="en-US" sz="1400" b="0" i="0">
+                <a:solidFill>
+                  <a:srgbClr val="1F3864"/>
+                </a:solidFill>
+                <a:latin typeface="Arial"/>
+              </a:rPr>
+              <a:t>is compared with its own lot and a 168 h forecast. Every decision</a:t>
+            </a:r>
+            <a:br>
+              <a:rPr lang="en-US" sz="1400" b="0" i="0">
+                <a:solidFill>
+                  <a:srgbClr val="1F3864"/>
+                </a:solidFill>
+                <a:latin typeface="Arial"/>
+              </a:rPr>
+            </a:br>
+            <a:r>
+              <a:rPr lang="en-US" sz="1400" b="0" i="0">
+                <a:solidFill>
+                  <a:srgbClr val="1F3864"/>
+                </a:solidFill>
+                <a:latin typeface="Arial"/>
+              </a:rPr>
+              <a:t>shows its numbers and the rule that fired.</a:t>
             </a:r>
           </a:p>
           <a:p>
@@ -5903,7 +5975,16 @@
                 <a:latin typeface="Arial" panose="020B0604020202020204" pitchFamily="34" charset="0"/>
                 <a:cs typeface="Arial" panose="020B0604020202020204" pitchFamily="34" charset="0"/>
               </a:rPr>
-              <a:t>PS Category- Software</a:t>
+              <a:t>PS Category-</a:t>
+            </a:r>
+            <a:r>
+              <a:rPr sz="1800" b="0" dirty="0">
+                <a:solidFill>
+                  <a:srgbClr val="0070C0"/>
+                </a:solidFill>
+                <a:latin typeface="Arial"/>
+              </a:rPr>
+              <a:t> Software</a:t>
             </a:r>
           </a:p>
           <a:p>
@@ -6355,7 +6436,7 @@
         <p:spPr>
           <a:xfrm>
             <a:off x="365760" y="1572768"/>
-            <a:ext cx="11457432" cy="603504"/>
+            <a:ext cx="11457432" cy="502920"/>
           </a:xfrm>
           <a:prstGeom prst="rect">
             <a:avLst/>
@@ -6380,7 +6461,7 @@
                 </a:solidFill>
                 <a:latin typeface="Arial"/>
               </a:rPr>
-              <a:t>A burn-in part can pass its datasheet limit yet be abnormal for its own lot or drifting toward failure — the latent defect the PS targets. At the 24 h checkpoint AgniDrishti compares every part with its lot peers, forecasts its 168 h value with a calibrated range, and returns </a:t>
+              <a:t>Latent defects stay inside the datasheet limit but drift. </a:t>
             </a:r>
             <a:r>
               <a:rPr sz="1300" b="1" i="0">
@@ -6389,7 +6470,7 @@
                 </a:solidFill>
                 <a:latin typeface="Arial"/>
               </a:rPr>
-              <a:t>PASS / REVIEW / REJECT</a:t>
+              <a:t>At hour 24, AgniDrishti compares each part with its own lot and a 168 h forecast.</a:t>
             </a:r>
             <a:r>
               <a:rPr sz="1300" b="0" i="0">
@@ -6398,7 +6479,7 @@
                 </a:solidFill>
                 <a:latin typeface="Arial"/>
               </a:rPr>
-              <a:t> with the rule that fired.</a:t>
+              <a:t> Every decision, PASS included, shows its numbers and the rule that fired; bad or missing data is never PASSed.</a:t>
             </a:r>
           </a:p>
         </p:txBody>
@@ -6411,8 +6492,8 @@
         </p:nvSpPr>
         <p:spPr>
           <a:xfrm>
-            <a:off x="365760" y="2231136"/>
-            <a:ext cx="5212080" cy="246888"/>
+            <a:off x="365760" y="2103120"/>
+            <a:ext cx="5852160" cy="246888"/>
           </a:xfrm>
           <a:prstGeom prst="rect">
             <a:avLst/>
@@ -6433,11 +6514,11 @@
             <a:r>
               <a:rPr sz="1100" b="1" i="0">
                 <a:solidFill>
-                  <a:srgbClr val="C55A11"/>
-                </a:solidFill>
-                <a:latin typeface="Arial"/>
-              </a:rPr>
-              <a:t>REAL RUN</a:t>
+                  <a:srgbClr val="1F3864"/>
+                </a:solidFill>
+                <a:latin typeface="Arial"/>
+              </a:rPr>
+              <a:t>PIPELINE OUTPUT</a:t>
             </a:r>
             <a:r>
               <a:rPr sz="1100" b="0" i="0">
@@ -6446,7 +6527,7 @@
                 </a:solidFill>
                 <a:latin typeface="Arial"/>
               </a:rPr>
-              <a:t> · SYNTHETIC held-out test lot · the datasheet check says PASS</a:t>
+              <a:t> · synthetic held-out lot (not ISRO data) · datasheet check: PASS</a:t>
             </a:r>
           </a:p>
         </p:txBody>
@@ -6467,8 +6548,8 @@
         </p:blipFill>
         <p:spPr>
           <a:xfrm>
-            <a:off x="365760" y="2487168"/>
-            <a:ext cx="5120640" cy="2715491"/>
+            <a:off x="365760" y="2340864"/>
+            <a:ext cx="5257800" cy="2867891"/>
           </a:xfrm>
           <a:prstGeom prst="rect">
             <a:avLst/>
@@ -6483,8 +6564,8 @@
         </p:nvSpPr>
         <p:spPr>
           <a:xfrm>
-            <a:off x="5715000" y="2231136"/>
-            <a:ext cx="6108192" cy="246888"/>
+            <a:off x="5897880" y="2103120"/>
+            <a:ext cx="5486400" cy="274320"/>
           </a:xfrm>
           <a:prstGeom prst="rect">
             <a:avLst/>
@@ -6503,65 +6584,27 @@
               </a:spcAft>
             </a:pPr>
             <a:r>
-              <a:rPr sz="1100" b="1" i="0">
-                <a:solidFill>
-                  <a:srgbClr val="1F3864"/>
-                </a:solidFill>
-                <a:latin typeface="Arial"/>
-              </a:rPr>
-              <a:t>SAME PART IN THE PROTOTYPE</a:t>
-            </a:r>
-            <a:r>
-              <a:rPr sz="1100" b="0" i="0">
-                <a:solidFill>
-                  <a:srgbClr val="595959"/>
-                </a:solidFill>
-                <a:latin typeface="Arial"/>
-              </a:rPr>
-              <a:t> · screenshot of the evidence card</a:t>
-            </a:r>
-          </a:p>
-        </p:txBody>
-      </p:sp>
-      <p:pic>
-        <p:nvPicPr>
-          <p:cNvPr id="15368" name="Picture 15367" descr="ui_card.png"/>
-          <p:cNvPicPr>
-            <a:picLocks noChangeAspect="1"/>
-          </p:cNvPicPr>
-          <p:nvPr/>
-        </p:nvPicPr>
-        <p:blipFill>
-          <a:blip r:embed="rId5"/>
-          <a:stretch>
-            <a:fillRect/>
-          </a:stretch>
-        </p:blipFill>
-        <p:spPr>
-          <a:xfrm>
-            <a:off x="5715000" y="2487168"/>
-            <a:ext cx="6108192" cy="1641844"/>
-          </a:xfrm>
-          <a:prstGeom prst="rect">
-            <a:avLst/>
-          </a:prstGeom>
-          <a:ln w="9525">
-            <a:solidFill>
-              <a:srgbClr val="BFBFBF"/>
-            </a:solidFill>
-          </a:ln>
-        </p:spPr>
-      </p:pic>
-      <p:sp>
-        <p:nvSpPr>
-          <p:cNvPr id="15369" name="TextBox 15368"/>
+              <a:rPr sz="1300" b="1" i="0">
+                <a:solidFill>
+                  <a:srgbClr val="0070C0"/>
+                </a:solidFill>
+                <a:latin typeface="Arial"/>
+              </a:rPr>
+              <a:t>How it addresses the problem</a:t>
+            </a:r>
+          </a:p>
+        </p:txBody>
+      </p:sp>
+      <p:sp>
+        <p:nvSpPr>
+          <p:cNvPr id="15368" name="TextBox 15367"/>
           <p:cNvSpPr txBox="1"/>
           <p:nvPr/>
         </p:nvSpPr>
         <p:spPr>
           <a:xfrm>
-            <a:off x="5715000" y="4187952"/>
-            <a:ext cx="6035040" cy="274320"/>
+            <a:off x="5897880" y="2514600"/>
+            <a:ext cx="5925312" cy="2560320"/>
           </a:xfrm>
           <a:prstGeom prst="rect">
             <a:avLst/>
@@ -6576,31 +6619,90 @@
           <a:p>
             <a:pPr algn="l">
               <a:spcAft>
-                <a:spcPts val="0"/>
-              </a:spcAft>
-            </a:pPr>
-            <a:r>
-              <a:rPr sz="1300" b="1" i="0">
-                <a:solidFill>
-                  <a:srgbClr val="0070C0"/>
-                </a:solidFill>
-                <a:latin typeface="Arial"/>
-              </a:rPr>
-              <a:t>How it addresses the problem</a:t>
-            </a:r>
-          </a:p>
-        </p:txBody>
-      </p:sp>
-      <p:sp>
-        <p:nvSpPr>
-          <p:cNvPr id="15370" name="TextBox 15369"/>
+                <a:spcPts val="1200"/>
+              </a:spcAft>
+            </a:pPr>
+            <a:r>
+              <a:rPr sz="1400" b="1" i="0">
+                <a:solidFill>
+                  <a:srgbClr val="1F3864"/>
+                </a:solidFill>
+                <a:latin typeface="Arial"/>
+              </a:rPr>
+              <a:t>Module A  </a:t>
+            </a:r>
+            <a:r>
+              <a:rPr sz="1400" b="0" i="0">
+                <a:solidFill>
+                  <a:srgbClr val="262626"/>
+                </a:solidFill>
+                <a:latin typeface="Arial"/>
+              </a:rPr>
+              <a:t>level and 0→24 h drift vs the part's own lot (robust z)</a:t>
+            </a:r>
+          </a:p>
+          <a:p>
+            <a:pPr algn="l">
+              <a:spcAft>
+                <a:spcPts val="1200"/>
+              </a:spcAft>
+            </a:pPr>
+            <a:r>
+              <a:rPr sz="1400" b="1" i="0">
+                <a:solidFill>
+                  <a:srgbClr val="1F3864"/>
+                </a:solidFill>
+                <a:latin typeface="Arial"/>
+              </a:rPr>
+              <a:t>Module B  </a:t>
+            </a:r>
+            <a:r>
+              <a:rPr sz="1400" b="0" i="0">
+                <a:solidFill>
+                  <a:srgbClr val="262626"/>
+                </a:solidFill>
+                <a:latin typeface="Arial"/>
+              </a:rPr>
+              <a:t>V0h + V24h → V168h forecast learned from past lots, with a 90 % range; early rejection if the drift rate exceeds the safety slope</a:t>
+            </a:r>
+          </a:p>
+          <a:p>
+            <a:pPr algn="l">
+              <a:spcAft>
+                <a:spcPts val="1200"/>
+              </a:spcAft>
+            </a:pPr>
+            <a:r>
+              <a:rPr sz="1400" b="1" i="0">
+                <a:solidFill>
+                  <a:srgbClr val="1F3864"/>
+                </a:solidFill>
+                <a:latin typeface="Arial"/>
+              </a:rPr>
+              <a:t>Decision  </a:t>
+            </a:r>
+            <a:r>
+              <a:rPr sz="1400" b="0" i="0">
+                <a:solidFill>
+                  <a:srgbClr val="262626"/>
+                </a:solidFill>
+                <a:latin typeface="Arial"/>
+              </a:rPr>
+              <a:t>ordered rules R0–R6; the rule that fired is the explanation; doubtful parts go to an engineer (REVIEW)</a:t>
+            </a:r>
+          </a:p>
+        </p:txBody>
+      </p:sp>
+      <p:sp>
+        <p:nvSpPr>
+          <p:cNvPr id="15369" name="TextBox 15368"/>
           <p:cNvSpPr txBox="1"/>
           <p:nvPr/>
         </p:nvSpPr>
         <p:spPr>
           <a:xfrm>
-            <a:off x="5715000" y="4462272"/>
-            <a:ext cx="6108192" cy="731520"/>
+            <a:off x="365760" y="5248656"/>
+            <a:ext cx="4206240" cy="274320"/>
           </a:xfrm>
           <a:prstGeom prst="rect">
             <a:avLst/>
@@ -6615,90 +6717,31 @@
           <a:p>
             <a:pPr algn="l">
               <a:spcAft>
-                <a:spcPts val="200"/>
-              </a:spcAft>
-            </a:pPr>
-            <a:r>
-              <a:rPr sz="1200" b="1" i="0">
-                <a:solidFill>
-                  <a:srgbClr val="1F3864"/>
-                </a:solidFill>
-                <a:latin typeface="Arial"/>
-              </a:rPr>
-              <a:t>Module A  </a:t>
-            </a:r>
-            <a:r>
-              <a:rPr sz="1200" b="0" i="0">
-                <a:solidFill>
-                  <a:srgbClr val="262626"/>
-                </a:solidFill>
-                <a:latin typeface="Arial"/>
-              </a:rPr>
-              <a:t>level and 0→24 h drift vs the part's own lot (robust z)</a:t>
-            </a:r>
-          </a:p>
-          <a:p>
-            <a:pPr algn="l">
-              <a:spcAft>
-                <a:spcPts val="200"/>
-              </a:spcAft>
-            </a:pPr>
-            <a:r>
-              <a:rPr sz="1200" b="1" i="0">
-                <a:solidFill>
-                  <a:srgbClr val="1F3864"/>
-                </a:solidFill>
-                <a:latin typeface="Arial"/>
-              </a:rPr>
-              <a:t>Module B  </a:t>
-            </a:r>
-            <a:r>
-              <a:rPr sz="1200" b="0" i="0">
-                <a:solidFill>
-                  <a:srgbClr val="262626"/>
-                </a:solidFill>
-                <a:latin typeface="Arial"/>
-              </a:rPr>
-              <a:t>V0h + V24h → V168h forecast with a 90 % calibrated range</a:t>
-            </a:r>
-          </a:p>
-          <a:p>
-            <a:pPr algn="l">
-              <a:spcAft>
-                <a:spcPts val="200"/>
-              </a:spcAft>
-            </a:pPr>
-            <a:r>
-              <a:rPr sz="1200" b="1" i="0">
-                <a:solidFill>
-                  <a:srgbClr val="1F3864"/>
-                </a:solidFill>
-                <a:latin typeface="Arial"/>
-              </a:rPr>
-              <a:t>Decision  </a:t>
-            </a:r>
-            <a:r>
-              <a:rPr sz="1200" b="0" i="0">
-                <a:solidFill>
-                  <a:srgbClr val="262626"/>
-                </a:solidFill>
-                <a:latin typeface="Arial"/>
-              </a:rPr>
-              <a:t>ordered rules R0–R6 — doubt goes to REVIEW, never PASS</a:t>
-            </a:r>
-          </a:p>
-        </p:txBody>
-      </p:sp>
-      <p:sp>
-        <p:nvSpPr>
-          <p:cNvPr id="15371" name="TextBox 15370"/>
+                <a:spcPts val="0"/>
+              </a:spcAft>
+            </a:pPr>
+            <a:r>
+              <a:rPr sz="1300" b="1" i="0">
+                <a:solidFill>
+                  <a:srgbClr val="0070C0"/>
+                </a:solidFill>
+                <a:latin typeface="Arial"/>
+              </a:rPr>
+              <a:t>Innovation and uniqueness of the solution</a:t>
+            </a:r>
+          </a:p>
+        </p:txBody>
+      </p:sp>
+      <p:sp>
+        <p:nvSpPr>
+          <p:cNvPr id="15370" name="TextBox 15369"/>
           <p:cNvSpPr txBox="1"/>
           <p:nvPr/>
         </p:nvSpPr>
         <p:spPr>
           <a:xfrm>
-            <a:off x="365760" y="5230368"/>
-            <a:ext cx="4206240" cy="274320"/>
+            <a:off x="4343400" y="5266944"/>
+            <a:ext cx="7479792" cy="246888"/>
           </a:xfrm>
           <a:prstGeom prst="rect">
             <a:avLst/>
@@ -6717,66 +6760,27 @@
               </a:spcAft>
             </a:pPr>
             <a:r>
-              <a:rPr sz="1300" b="1" i="0">
-                <a:solidFill>
-                  <a:srgbClr val="0070C0"/>
-                </a:solidFill>
-                <a:latin typeface="Arial"/>
-              </a:rPr>
-              <a:t>Innovation and uniqueness of the solution</a:t>
-            </a:r>
-          </a:p>
-        </p:txBody>
-      </p:sp>
-      <p:sp>
-        <p:nvSpPr>
-          <p:cNvPr id="15372" name="TextBox 15371"/>
-          <p:cNvSpPr txBox="1"/>
-          <p:nvPr/>
-        </p:nvSpPr>
-        <p:spPr>
-          <a:xfrm>
-            <a:off x="4343400" y="5248656"/>
-            <a:ext cx="3108960" cy="246888"/>
-          </a:xfrm>
-          <a:prstGeom prst="rect">
-            <a:avLst/>
-          </a:prstGeom>
-          <a:noFill/>
-        </p:spPr>
-        <p:txBody>
-          <a:bodyPr wrap="square" anchor="t" lIns="36576" rIns="36576" tIns="36576" bIns="36576">
-            <a:spAutoFit/>
-          </a:bodyPr>
-          <a:lstStyle/>
-          <a:p>
-            <a:pPr algn="l">
-              <a:spcAft>
-                <a:spcPts val="0"/>
-              </a:spcAft>
-            </a:pPr>
-            <a:r>
               <a:rPr sz="1100" b="0" i="0">
                 <a:solidFill>
                   <a:srgbClr val="595959"/>
                 </a:solidFill>
                 <a:latin typeface="Arial"/>
               </a:rPr>
-              <a:t>Drifting rows caught at 24 h · held-out test lots</a:t>
-            </a:r>
-          </a:p>
-        </p:txBody>
-      </p:sp>
-      <p:sp>
-        <p:nvSpPr>
-          <p:cNvPr id="15373" name="Rounded Rectangle 15372"/>
+              <a:t>Drifting part-parameters caught at hour 24, of 30 (held-out synthetic lots; part-parameter = one part × one parameter)</a:t>
+            </a:r>
+          </a:p>
+        </p:txBody>
+      </p:sp>
+      <p:sp>
+        <p:nvSpPr>
+          <p:cNvPr id="15371" name="Rounded Rectangle 15370"/>
           <p:cNvSpPr/>
           <p:nvPr/>
         </p:nvSpPr>
         <p:spPr>
           <a:xfrm>
-            <a:off x="365760" y="5486400"/>
-            <a:ext cx="1691640" cy="786384"/>
+            <a:off x="365760" y="5559552"/>
+            <a:ext cx="2782062" cy="731520"/>
           </a:xfrm>
           <a:prstGeom prst="roundRect">
             <a:avLst>
@@ -6806,7 +6810,7 @@
           </a:fontRef>
         </p:style>
         <p:txBody>
-          <a:bodyPr rtlCol="0" anchor="ctr" wrap="square" lIns="36576" rIns="36576" tIns="36576" bIns="36576"/>
+          <a:bodyPr rtlCol="0" anchor="ctr" wrap="square" lIns="27432" rIns="27432" tIns="27432" bIns="27432"/>
           <a:lstStyle/>
           <a:p>
             <a:pPr algn="ctr">
@@ -6831,27 +6835,27 @@
               </a:spcAft>
             </a:pPr>
             <a:r>
-              <a:rPr sz="1100" b="0" i="0">
+              <a:rPr sz="1200" b="0" i="0">
                 <a:solidFill>
                   <a:srgbClr val="262626"/>
                 </a:solidFill>
                 <a:latin typeface="Arial"/>
               </a:rPr>
-              <a:t>Datasheet limit only</a:t>
-            </a:r>
-          </a:p>
-        </p:txBody>
-      </p:sp>
-      <p:sp>
-        <p:nvSpPr>
-          <p:cNvPr id="15374" name="Rounded Rectangle 15373"/>
+              <a:t>datasheet limit at 24 h</a:t>
+            </a:r>
+          </a:p>
+        </p:txBody>
+      </p:sp>
+      <p:sp>
+        <p:nvSpPr>
+          <p:cNvPr id="15372" name="Rounded Rectangle 15371"/>
           <p:cNvSpPr/>
           <p:nvPr/>
         </p:nvSpPr>
         <p:spPr>
           <a:xfrm>
-            <a:off x="2148840" y="5486400"/>
-            <a:ext cx="1691640" cy="786384"/>
+            <a:off x="3257550" y="5559552"/>
+            <a:ext cx="2782062" cy="731520"/>
           </a:xfrm>
           <a:prstGeom prst="roundRect">
             <a:avLst>
@@ -6881,7 +6885,7 @@
           </a:fontRef>
         </p:style>
         <p:txBody>
-          <a:bodyPr rtlCol="0" anchor="ctr" wrap="square" lIns="36576" rIns="36576" tIns="36576" bIns="36576"/>
+          <a:bodyPr rtlCol="0" anchor="ctr" wrap="square" lIns="27432" rIns="27432" tIns="27432" bIns="27432"/>
           <a:lstStyle/>
           <a:p>
             <a:pPr algn="ctr">
@@ -6906,27 +6910,27 @@
               </a:spcAft>
             </a:pPr>
             <a:r>
-              <a:rPr sz="1100" b="0" i="0">
+              <a:rPr sz="1200" b="0" i="0">
                 <a:solidFill>
                   <a:srgbClr val="262626"/>
                 </a:solidFill>
                 <a:latin typeface="Arial"/>
               </a:rPr>
-              <a:t>+ DPAT lot level</a:t>
-            </a:r>
-          </a:p>
-        </p:txBody>
-      </p:sp>
-      <p:sp>
-        <p:nvSpPr>
-          <p:cNvPr id="15375" name="Rounded Rectangle 15374"/>
+              <a:t>+ DPAT lot level (AEC-Q001)</a:t>
+            </a:r>
+          </a:p>
+        </p:txBody>
+      </p:sp>
+      <p:sp>
+        <p:nvSpPr>
+          <p:cNvPr id="15373" name="Rounded Rectangle 15372"/>
           <p:cNvSpPr/>
           <p:nvPr/>
         </p:nvSpPr>
         <p:spPr>
           <a:xfrm>
-            <a:off x="3931920" y="5486400"/>
-            <a:ext cx="1691640" cy="786384"/>
+            <a:off x="6149340" y="5559552"/>
+            <a:ext cx="2782062" cy="731520"/>
           </a:xfrm>
           <a:prstGeom prst="roundRect">
             <a:avLst>
@@ -6934,7 +6938,7 @@
             </a:avLst>
           </a:prstGeom>
           <a:solidFill>
-            <a:srgbClr val="FBECE2"/>
+            <a:srgbClr val="DDEBF7"/>
           </a:solidFill>
           <a:ln>
             <a:noFill/>
@@ -6956,7 +6960,7 @@
           </a:fontRef>
         </p:style>
         <p:txBody>
-          <a:bodyPr rtlCol="0" anchor="ctr" wrap="square" lIns="36576" rIns="36576" tIns="36576" bIns="36576"/>
+          <a:bodyPr rtlCol="0" anchor="ctr" wrap="square" lIns="27432" rIns="27432" tIns="27432" bIns="27432"/>
           <a:lstStyle/>
           <a:p>
             <a:pPr algn="ctr">
@@ -6967,7 +6971,7 @@
             <a:r>
               <a:rPr sz="2000" b="1" i="0">
                 <a:solidFill>
-                  <a:srgbClr val="C55A11"/>
+                  <a:srgbClr val="1F3864"/>
                 </a:solidFill>
                 <a:latin typeface="Arial"/>
               </a:rPr>
@@ -6981,9 +6985,9 @@
               </a:spcAft>
             </a:pPr>
             <a:r>
-              <a:rPr sz="1100" b="0" i="0">
-                <a:solidFill>
-                  <a:srgbClr val="C55A11"/>
+              <a:rPr sz="1200" b="0" i="0">
+                <a:solidFill>
+                  <a:srgbClr val="1F3864"/>
                 </a:solidFill>
                 <a:latin typeface="Arial"/>
               </a:rPr>
@@ -6994,14 +6998,14 @@
       </p:sp>
       <p:sp>
         <p:nvSpPr>
-          <p:cNvPr id="15376" name="Rounded Rectangle 15375"/>
+          <p:cNvPr id="15374" name="Rounded Rectangle 15373"/>
           <p:cNvSpPr/>
           <p:nvPr/>
         </p:nvSpPr>
         <p:spPr>
           <a:xfrm>
-            <a:off x="5715000" y="5486400"/>
-            <a:ext cx="1691640" cy="786384"/>
+            <a:off x="9041130" y="5559552"/>
+            <a:ext cx="2782062" cy="731520"/>
           </a:xfrm>
           <a:prstGeom prst="roundRect">
             <a:avLst>
@@ -7031,7 +7035,7 @@
           </a:fontRef>
         </p:style>
         <p:txBody>
-          <a:bodyPr rtlCol="0" anchor="ctr" wrap="square" lIns="36576" rIns="36576" tIns="36576" bIns="36576"/>
+          <a:bodyPr rtlCol="0" anchor="ctr" wrap="square" lIns="27432" rIns="27432" tIns="27432" bIns="27432"/>
           <a:lstStyle/>
           <a:p>
             <a:pPr algn="ctr">
@@ -7056,61 +7060,13 @@
               </a:spcAft>
             </a:pPr>
             <a:r>
-              <a:rPr sz="1100" b="0" i="0">
+              <a:rPr sz="1200" b="0" i="0">
                 <a:solidFill>
                   <a:srgbClr val="FFFFFF"/>
                 </a:solidFill>
                 <a:latin typeface="Arial"/>
               </a:rPr>
-              <a:t>AgniDrishti · 10.4 % to REVIEW</a:t>
-            </a:r>
-          </a:p>
-        </p:txBody>
-      </p:sp>
-      <p:sp>
-        <p:nvSpPr>
-          <p:cNvPr id="15377" name="TextBox 15376"/>
-          <p:cNvSpPr txBox="1"/>
-          <p:nvPr/>
-        </p:nvSpPr>
-        <p:spPr>
-          <a:xfrm>
-            <a:off x="7543800" y="5468112"/>
-            <a:ext cx="4279392" cy="822960"/>
-          </a:xfrm>
-          <a:prstGeom prst="rect">
-            <a:avLst/>
-          </a:prstGeom>
-          <a:noFill/>
-        </p:spPr>
-        <p:txBody>
-          <a:bodyPr wrap="square" anchor="t" lIns="36576" rIns="36576" tIns="36576" bIns="36576">
-            <a:spAutoFit/>
-          </a:bodyPr>
-          <a:lstStyle/>
-          <a:p>
-            <a:pPr algn="l">
-              <a:spcAft>
-                <a:spcPts val="0"/>
-              </a:spcAft>
-            </a:pPr>
-            <a:r>
-              <a:rPr sz="1200" b="1" i="0">
-                <a:solidFill>
-                  <a:srgbClr val="C55A11"/>
-                </a:solidFill>
-                <a:latin typeface="Arial"/>
-              </a:rPr>
-              <a:t>Doubt is never a PASS</a:t>
-            </a:r>
-            <a:r>
-              <a:rPr sz="1200" b="0" i="0">
-                <a:solidFill>
-                  <a:srgbClr val="262626"/>
-                </a:solidFill>
-                <a:latin typeface="Arial"/>
-              </a:rPr>
-              <a:t> — bad data, or a 168 h range that could reach the limit, goes to an engineer. Not a weighted risk score: the rule that fired is the explanation. Every layer stays only if it helps on unseen lots.</a:t>
+              <a:t>full AgniDrishti · 11 % flagged</a:t>
             </a:r>
           </a:p>
         </p:txBody>
@@ -7400,8 +7356,8 @@
         </p:nvSpPr>
         <p:spPr>
           <a:xfrm>
-            <a:off x="365760" y="987552"/>
-            <a:ext cx="11457432" cy="329184"/>
+            <a:off x="365760" y="969264"/>
+            <a:ext cx="11457432" cy="310896"/>
           </a:xfrm>
           <a:prstGeom prst="rect">
             <a:avLst/>
@@ -7420,26 +7376,251 @@
               </a:spcAft>
             </a:pPr>
             <a:r>
-              <a:rPr sz="1600" b="1" i="0">
+              <a:rPr sz="1500" b="1" i="0">
                 <a:solidFill>
                   <a:srgbClr val="1F3864"/>
                 </a:solidFill>
                 <a:latin typeface="Arial"/>
               </a:rPr>
-              <a:t>Every layer must beat a simpler baseline on unseen lots — or it is removed.</a:t>
-            </a:r>
-          </a:p>
-        </p:txBody>
-      </p:sp>
-      <p:sp>
-        <p:nvSpPr>
-          <p:cNvPr id="17411" name="TextBox 17410"/>
+              <a:t>Every layer is tested against a simpler baseline on held-out lots — the results include what did not help.</a:t>
+            </a:r>
+          </a:p>
+        </p:txBody>
+      </p:sp>
+      <p:sp>
+        <p:nvSpPr>
+          <p:cNvPr id="17411" name="Rounded Rectangle 17410"/>
+          <p:cNvSpPr/>
+          <p:nvPr/>
+        </p:nvSpPr>
+        <p:spPr>
+          <a:xfrm>
+            <a:off x="365760" y="1298448"/>
+            <a:ext cx="3758184" cy="530352"/>
+          </a:xfrm>
+          <a:prstGeom prst="roundRect">
+            <a:avLst>
+              <a:gd name="adj" fmla="val 12000"/>
+            </a:avLst>
+          </a:prstGeom>
+          <a:solidFill>
+            <a:srgbClr val="1F3864"/>
+          </a:solidFill>
+          <a:ln>
+            <a:noFill/>
+          </a:ln>
+          <a:effectLst/>
+        </p:spPr>
+        <p:style>
+          <a:lnRef idx="1">
+            <a:schemeClr val="accent1"/>
+          </a:lnRef>
+          <a:fillRef idx="3">
+            <a:schemeClr val="accent1"/>
+          </a:fillRef>
+          <a:effectRef idx="2">
+            <a:schemeClr val="accent1"/>
+          </a:effectRef>
+          <a:fontRef idx="minor">
+            <a:schemeClr val="lt1"/>
+          </a:fontRef>
+        </p:style>
+        <p:txBody>
+          <a:bodyPr rtlCol="0" anchor="ctr" wrap="square" lIns="73152" rIns="73152" tIns="73152" bIns="73152"/>
+          <a:lstStyle/>
+          <a:p>
+            <a:pPr algn="l">
+              <a:spcAft>
+                <a:spcPts val="0"/>
+              </a:spcAft>
+            </a:pPr>
+            <a:r>
+              <a:rPr sz="1150" b="1" i="0">
+                <a:solidFill>
+                  <a:srgbClr val="FFFFFF"/>
+                </a:solidFill>
+                <a:latin typeface="Arial"/>
+              </a:rPr>
+              <a:t>PS metric 1 · missed defects (test lots)</a:t>
+            </a:r>
+          </a:p>
+          <a:p>
+            <a:pPr algn="l">
+              <a:spcAft>
+                <a:spcPts val="0"/>
+              </a:spcAft>
+            </a:pPr>
+            <a:r>
+              <a:rPr sz="1150" b="0" i="0">
+                <a:solidFill>
+                  <a:srgbClr val="FFFFFF"/>
+                </a:solidFill>
+                <a:latin typeface="Arial"/>
+              </a:rPr>
+              <a:t>recall 0.80 (95 % CI 0.63–0.91); 11 % flagged</a:t>
+            </a:r>
+          </a:p>
+        </p:txBody>
+      </p:sp>
+      <p:sp>
+        <p:nvSpPr>
+          <p:cNvPr id="17412" name="Rounded Rectangle 17411"/>
+          <p:cNvSpPr/>
+          <p:nvPr/>
+        </p:nvSpPr>
+        <p:spPr>
+          <a:xfrm>
+            <a:off x="4215384" y="1298448"/>
+            <a:ext cx="3758184" cy="530352"/>
+          </a:xfrm>
+          <a:prstGeom prst="roundRect">
+            <a:avLst>
+              <a:gd name="adj" fmla="val 12000"/>
+            </a:avLst>
+          </a:prstGeom>
+          <a:solidFill>
+            <a:srgbClr val="1F3864"/>
+          </a:solidFill>
+          <a:ln>
+            <a:noFill/>
+          </a:ln>
+          <a:effectLst/>
+        </p:spPr>
+        <p:style>
+          <a:lnRef idx="1">
+            <a:schemeClr val="accent1"/>
+          </a:lnRef>
+          <a:fillRef idx="3">
+            <a:schemeClr val="accent1"/>
+          </a:fillRef>
+          <a:effectRef idx="2">
+            <a:schemeClr val="accent1"/>
+          </a:effectRef>
+          <a:fontRef idx="minor">
+            <a:schemeClr val="lt1"/>
+          </a:fontRef>
+        </p:style>
+        <p:txBody>
+          <a:bodyPr rtlCol="0" anchor="ctr" wrap="square" lIns="73152" rIns="73152" tIns="73152" bIns="73152"/>
+          <a:lstStyle/>
+          <a:p>
+            <a:pPr algn="l">
+              <a:spcAft>
+                <a:spcPts val="0"/>
+              </a:spcAft>
+            </a:pPr>
+            <a:r>
+              <a:rPr sz="1150" b="1" i="0">
+                <a:solidFill>
+                  <a:srgbClr val="FFFFFF"/>
+                </a:solidFill>
+                <a:latin typeface="Arial"/>
+              </a:rPr>
+              <a:t>PS metric 2 · 168 h MAE (validation lots)</a:t>
+            </a:r>
+          </a:p>
+          <a:p>
+            <a:pPr algn="l">
+              <a:spcAft>
+                <a:spcPts val="0"/>
+              </a:spcAft>
+            </a:pPr>
+            <a:r>
+              <a:rPr sz="1150" b="0" i="0">
+                <a:solidFill>
+                  <a:srgbClr val="FFFFFF"/>
+                </a:solidFill>
+                <a:latin typeface="Arial"/>
+              </a:rPr>
+              <a:t>Iddq 0.297 vs 0.338 µA · tpd 0.047 vs 0.050 ns*</a:t>
+            </a:r>
+          </a:p>
+        </p:txBody>
+      </p:sp>
+      <p:sp>
+        <p:nvSpPr>
+          <p:cNvPr id="17413" name="Rounded Rectangle 17412"/>
+          <p:cNvSpPr/>
+          <p:nvPr/>
+        </p:nvSpPr>
+        <p:spPr>
+          <a:xfrm>
+            <a:off x="8065008" y="1298448"/>
+            <a:ext cx="3758184" cy="530352"/>
+          </a:xfrm>
+          <a:prstGeom prst="roundRect">
+            <a:avLst>
+              <a:gd name="adj" fmla="val 12000"/>
+            </a:avLst>
+          </a:prstGeom>
+          <a:solidFill>
+            <a:srgbClr val="1F3864"/>
+          </a:solidFill>
+          <a:ln>
+            <a:noFill/>
+          </a:ln>
+          <a:effectLst/>
+        </p:spPr>
+        <p:style>
+          <a:lnRef idx="1">
+            <a:schemeClr val="accent1"/>
+          </a:lnRef>
+          <a:fillRef idx="3">
+            <a:schemeClr val="accent1"/>
+          </a:fillRef>
+          <a:effectRef idx="2">
+            <a:schemeClr val="accent1"/>
+          </a:effectRef>
+          <a:fontRef idx="minor">
+            <a:schemeClr val="lt1"/>
+          </a:fontRef>
+        </p:style>
+        <p:txBody>
+          <a:bodyPr rtlCol="0" anchor="ctr" wrap="square" lIns="73152" rIns="73152" tIns="73152" bIns="73152"/>
+          <a:lstStyle/>
+          <a:p>
+            <a:pPr algn="l">
+              <a:spcAft>
+                <a:spcPts val="0"/>
+              </a:spcAft>
+            </a:pPr>
+            <a:r>
+              <a:rPr sz="1150" b="1" i="0">
+                <a:solidFill>
+                  <a:srgbClr val="FFFFFF"/>
+                </a:solidFill>
+                <a:latin typeface="Arial"/>
+              </a:rPr>
+              <a:t>PS metric 3 · explainability</a:t>
+            </a:r>
+          </a:p>
+          <a:p>
+            <a:pPr algn="l">
+              <a:spcAft>
+                <a:spcPts val="0"/>
+              </a:spcAft>
+            </a:pPr>
+            <a:r>
+              <a:rPr sz="1150" b="0" i="0">
+                <a:solidFill>
+                  <a:srgbClr val="FFFFFF"/>
+                </a:solidFill>
+                <a:latin typeface="Arial"/>
+              </a:rPr>
+              <a:t>each decision shows its numbers + the rule fired</a:t>
+            </a:r>
+          </a:p>
+        </p:txBody>
+      </p:sp>
+      <p:sp>
+        <p:nvSpPr>
+          <p:cNvPr id="17414" name="TextBox 17413"/>
           <p:cNvSpPr txBox="1"/>
           <p:nvPr/>
         </p:nvSpPr>
         <p:spPr>
           <a:xfrm>
-            <a:off x="365760" y="1316736"/>
+            <a:off x="365760" y="1865376"/>
             <a:ext cx="8686800" cy="274320"/>
           </a:xfrm>
           <a:prstGeom prst="rect">
@@ -7472,14 +7653,14 @@
       </p:sp>
       <p:sp>
         <p:nvSpPr>
-          <p:cNvPr id="17412" name="TextBox 17411"/>
+          <p:cNvPr id="17415" name="TextBox 17414"/>
           <p:cNvSpPr txBox="1"/>
           <p:nvPr/>
         </p:nvSpPr>
         <p:spPr>
           <a:xfrm>
-            <a:off x="365760" y="1572768"/>
-            <a:ext cx="11457432" cy="475488"/>
+            <a:off x="365760" y="2103120"/>
+            <a:ext cx="11457432" cy="420624"/>
           </a:xfrm>
           <a:prstGeom prst="rect">
             <a:avLst/>
@@ -7498,13 +7679,22 @@
               </a:spcAft>
             </a:pPr>
             <a:r>
-              <a:rPr sz="1200" b="0" i="0">
+              <a:rPr sz="1100" b="1" i="0">
+                <a:solidFill>
+                  <a:srgbClr val="1F3864"/>
+                </a:solidFill>
+                <a:latin typeface="Arial"/>
+              </a:rPr>
+              <a:t>Module B: </a:t>
+            </a:r>
+            <a:r>
+              <a:rPr sz="1100" b="0" i="0">
                 <a:solidFill>
                   <a:srgbClr val="262626"/>
                 </a:solidFill>
                 <a:latin typeface="Arial"/>
               </a:rPr>
-              <a:t>Python 3.11 · pandas / NumPy · robust statistics · least-squares forecasts · split-conformal ranges · web service + UI · pytest · YAML config — offline, CPU only.</a:t>
+              <a:t>4 forecasters compared on validation MAE; a learned population increment (V24 + median 24→168 h rise) beat least-squares regression; 90 % split-conformal range.</a:t>
             </a:r>
           </a:p>
           <a:p>
@@ -7514,35 +7704,53 @@
               </a:spcAft>
             </a:pPr>
             <a:r>
-              <a:rPr sz="1200" b="1" i="0">
+              <a:rPr sz="1100" b="1" i="0">
                 <a:solidFill>
                   <a:srgbClr val="1F3864"/>
                 </a:solidFill>
                 <a:latin typeface="Arial"/>
               </a:rPr>
-              <a:t>Learned from historical lots: </a:t>
-            </a:r>
-            <a:r>
-              <a:rPr sz="1200" b="0" i="0">
+              <a:t>Module A: </a:t>
+            </a:r>
+            <a:r>
+              <a:rPr sz="1100" b="0" i="0">
                 <a:solidFill>
                   <a:srgbClr val="262626"/>
                 </a:solidFill>
                 <a:latin typeface="Arial"/>
               </a:rPr>
-              <a:t>forecast model chosen by held-out MAE, 90 % range calibrated on held-out lots, review threshold set on validation lots.</a:t>
-            </a:r>
-          </a:p>
-        </p:txBody>
-      </p:sp>
-      <p:sp>
-        <p:nvSpPr>
-          <p:cNvPr id="17413" name="TextBox 17412"/>
+              <a:t>robust lot statistics · </a:t>
+            </a:r>
+            <a:r>
+              <a:rPr sz="1100" b="1" i="0">
+                <a:solidFill>
+                  <a:srgbClr val="1F3864"/>
+                </a:solidFill>
+                <a:latin typeface="Arial"/>
+              </a:rPr>
+              <a:t>Decisions: </a:t>
+            </a:r>
+            <a:r>
+              <a:rPr sz="1100" b="0" i="0">
+                <a:solidFill>
+                  <a:srgbClr val="262626"/>
+                </a:solidFill>
+                <a:latin typeface="Arial"/>
+              </a:rPr>
+              <a:t>ordered rules, every output explainable · Python, web UI + CLI, offline, CPU only.</a:t>
+            </a:r>
+          </a:p>
+        </p:txBody>
+      </p:sp>
+      <p:sp>
+        <p:nvSpPr>
+          <p:cNvPr id="17416" name="TextBox 17415"/>
           <p:cNvSpPr txBox="1"/>
           <p:nvPr/>
         </p:nvSpPr>
         <p:spPr>
           <a:xfrm>
-            <a:off x="365760" y="2103120"/>
+            <a:off x="365760" y="2560320"/>
             <a:ext cx="8686800" cy="274320"/>
           </a:xfrm>
           <a:prstGeom prst="rect">
@@ -7575,13 +7783,13 @@
       </p:sp>
       <p:sp>
         <p:nvSpPr>
-          <p:cNvPr id="17414" name="TextBox 17413"/>
+          <p:cNvPr id="17417" name="TextBox 17416"/>
           <p:cNvSpPr txBox="1"/>
           <p:nvPr/>
         </p:nvSpPr>
         <p:spPr>
           <a:xfrm>
-            <a:off x="8778240" y="2121408"/>
+            <a:off x="8778240" y="2578608"/>
             <a:ext cx="3044952" cy="246888"/>
           </a:xfrm>
           <a:prstGeom prst="rect">
@@ -7607,21 +7815,21 @@
                 </a:solidFill>
                 <a:latin typeface="Arial"/>
               </a:rPr>
-              <a:t>✓ built and tested (commit 1f5d29a)</a:t>
-            </a:r>
-          </a:p>
-        </p:txBody>
-      </p:sp>
-      <p:sp>
-        <p:nvSpPr>
-          <p:cNvPr id="17415" name="Rounded Rectangle 17414"/>
+              <a:t>✓ all built and tested (commit 1f5d29a)</a:t>
+            </a:r>
+          </a:p>
+        </p:txBody>
+      </p:sp>
+      <p:sp>
+        <p:nvSpPr>
+          <p:cNvPr id="17418" name="Rounded Rectangle 17417"/>
           <p:cNvSpPr/>
           <p:nvPr/>
         </p:nvSpPr>
         <p:spPr>
           <a:xfrm>
-            <a:off x="365760" y="2395728"/>
-            <a:ext cx="1248156" cy="566928"/>
+            <a:off x="365760" y="2816352"/>
+            <a:ext cx="1248156" cy="420624"/>
           </a:xfrm>
           <a:prstGeom prst="roundRect">
             <a:avLst>
@@ -7651,7 +7859,7 @@
           </a:fontRef>
         </p:style>
         <p:txBody>
-          <a:bodyPr rtlCol="0" anchor="ctr" wrap="square" lIns="36576" rIns="36576" tIns="36576" bIns="36576"/>
+          <a:bodyPr rtlCol="0" anchor="ctr" wrap="square" lIns="18288" rIns="18288" tIns="18288" bIns="18288"/>
           <a:lstStyle/>
           <a:p>
             <a:pPr algn="ctr">
@@ -7660,16 +7868,7 @@
               </a:spcAft>
             </a:pPr>
             <a:r>
-              <a:rPr sz="1100" b="0" i="0">
-                <a:solidFill>
-                  <a:srgbClr val="2E7D32"/>
-                </a:solidFill>
-                <a:latin typeface="Arial"/>
-              </a:rPr>
-              <a:t>✓ </a:t>
-            </a:r>
-            <a:r>
-              <a:rPr sz="1100" b="1" i="0">
+              <a:rPr sz="1050" b="1" i="0">
                 <a:solidFill>
                   <a:srgbClr val="1F3864"/>
                 </a:solidFill>
@@ -7685,26 +7884,26 @@
               </a:spcAft>
             </a:pPr>
             <a:r>
-              <a:rPr sz="1100" b="0" i="0">
+              <a:rPr sz="1050" b="0" i="0">
                 <a:solidFill>
                   <a:srgbClr val="1F3864"/>
                 </a:solidFill>
                 <a:latin typeface="Arial"/>
               </a:rPr>
-              <a:t>any CSV layout</a:t>
-            </a:r>
-          </a:p>
-        </p:txBody>
-      </p:sp>
-      <p:sp>
-        <p:nvSpPr>
-          <p:cNvPr id="17416" name="Right Arrow 17415"/>
+              <a:t>any column layout</a:t>
+            </a:r>
+          </a:p>
+        </p:txBody>
+      </p:sp>
+      <p:sp>
+        <p:nvSpPr>
+          <p:cNvPr id="17419" name="Right Arrow 17418"/>
           <p:cNvSpPr/>
           <p:nvPr/>
         </p:nvSpPr>
         <p:spPr>
           <a:xfrm>
-            <a:off x="1645920" y="2606040"/>
+            <a:off x="1645920" y="2953512"/>
             <a:ext cx="146304" cy="146304"/>
           </a:xfrm>
           <a:prstGeom prst="rightArrow">
@@ -7742,14 +7941,14 @@
       </p:sp>
       <p:sp>
         <p:nvSpPr>
-          <p:cNvPr id="17417" name="Rounded Rectangle 17416"/>
+          <p:cNvPr id="17420" name="Rounded Rectangle 17419"/>
           <p:cNvSpPr/>
           <p:nvPr/>
         </p:nvSpPr>
         <p:spPr>
           <a:xfrm>
-            <a:off x="1824228" y="2395728"/>
-            <a:ext cx="1248156" cy="566928"/>
+            <a:off x="1824228" y="2816352"/>
+            <a:ext cx="1248156" cy="420624"/>
           </a:xfrm>
           <a:prstGeom prst="roundRect">
             <a:avLst>
@@ -7779,7 +7978,7 @@
           </a:fontRef>
         </p:style>
         <p:txBody>
-          <a:bodyPr rtlCol="0" anchor="ctr" wrap="square" lIns="36576" rIns="36576" tIns="36576" bIns="36576"/>
+          <a:bodyPr rtlCol="0" anchor="ctr" wrap="square" lIns="18288" rIns="18288" tIns="18288" bIns="18288"/>
           <a:lstStyle/>
           <a:p>
             <a:pPr algn="ctr">
@@ -7788,16 +7987,7 @@
               </a:spcAft>
             </a:pPr>
             <a:r>
-              <a:rPr sz="1100" b="0" i="0">
-                <a:solidFill>
-                  <a:srgbClr val="2E7D32"/>
-                </a:solidFill>
-                <a:latin typeface="Arial"/>
-              </a:rPr>
-              <a:t>✓ </a:t>
-            </a:r>
-            <a:r>
-              <a:rPr sz="1100" b="1" i="0">
+              <a:rPr sz="1050" b="1" i="0">
                 <a:solidFill>
                   <a:srgbClr val="1F3864"/>
                 </a:solidFill>
@@ -7813,7 +8003,7 @@
               </a:spcAft>
             </a:pPr>
             <a:r>
-              <a:rPr sz="1100" b="0" i="0">
+              <a:rPr sz="1050" b="0" i="0">
                 <a:solidFill>
                   <a:srgbClr val="1F3864"/>
                 </a:solidFill>
@@ -7826,13 +8016,13 @@
       </p:sp>
       <p:sp>
         <p:nvSpPr>
-          <p:cNvPr id="17418" name="Right Arrow 17417"/>
+          <p:cNvPr id="17421" name="Right Arrow 17420"/>
           <p:cNvSpPr/>
           <p:nvPr/>
         </p:nvSpPr>
         <p:spPr>
           <a:xfrm>
-            <a:off x="3104388" y="2606040"/>
+            <a:off x="3104388" y="2953512"/>
             <a:ext cx="146304" cy="146304"/>
           </a:xfrm>
           <a:prstGeom prst="rightArrow">
@@ -7870,14 +8060,14 @@
       </p:sp>
       <p:sp>
         <p:nvSpPr>
-          <p:cNvPr id="17419" name="Rounded Rectangle 17418"/>
+          <p:cNvPr id="17422" name="Rounded Rectangle 17421"/>
           <p:cNvSpPr/>
           <p:nvPr/>
         </p:nvSpPr>
         <p:spPr>
           <a:xfrm>
-            <a:off x="3282696" y="2395728"/>
-            <a:ext cx="1248156" cy="566928"/>
+            <a:off x="3282696" y="2816352"/>
+            <a:ext cx="1248156" cy="420624"/>
           </a:xfrm>
           <a:prstGeom prst="roundRect">
             <a:avLst>
@@ -7907,7 +8097,7 @@
           </a:fontRef>
         </p:style>
         <p:txBody>
-          <a:bodyPr rtlCol="0" anchor="ctr" wrap="square" lIns="36576" rIns="36576" tIns="36576" bIns="36576"/>
+          <a:bodyPr rtlCol="0" anchor="ctr" wrap="square" lIns="18288" rIns="18288" tIns="18288" bIns="18288"/>
           <a:lstStyle/>
           <a:p>
             <a:pPr algn="ctr">
@@ -7916,16 +8106,7 @@
               </a:spcAft>
             </a:pPr>
             <a:r>
-              <a:rPr sz="1100" b="0" i="0">
-                <a:solidFill>
-                  <a:srgbClr val="2E7D32"/>
-                </a:solidFill>
-                <a:latin typeface="Arial"/>
-              </a:rPr>
-              <a:t>✓ </a:t>
-            </a:r>
-            <a:r>
-              <a:rPr sz="1100" b="1" i="0">
+              <a:rPr sz="1050" b="1" i="0">
                 <a:solidFill>
                   <a:srgbClr val="1F3864"/>
                 </a:solidFill>
@@ -7941,26 +8122,26 @@
               </a:spcAft>
             </a:pPr>
             <a:r>
-              <a:rPr sz="1100" b="0" i="0">
+              <a:rPr sz="1050" b="0" i="0">
                 <a:solidFill>
                   <a:srgbClr val="1F3864"/>
                 </a:solidFill>
                 <a:latin typeface="Arial"/>
               </a:rPr>
-              <a:t>bad data → REVIEW</a:t>
-            </a:r>
-          </a:p>
-        </p:txBody>
-      </p:sp>
-      <p:sp>
-        <p:nvSpPr>
-          <p:cNvPr id="17420" name="Right Arrow 17419"/>
+              <a:t>bad → REVIEW</a:t>
+            </a:r>
+          </a:p>
+        </p:txBody>
+      </p:sp>
+      <p:sp>
+        <p:nvSpPr>
+          <p:cNvPr id="17423" name="Right Arrow 17422"/>
           <p:cNvSpPr/>
           <p:nvPr/>
         </p:nvSpPr>
         <p:spPr>
           <a:xfrm>
-            <a:off x="4562856" y="2606040"/>
+            <a:off x="4562856" y="2953512"/>
             <a:ext cx="146304" cy="146304"/>
           </a:xfrm>
           <a:prstGeom prst="rightArrow">
@@ -7998,14 +8179,14 @@
       </p:sp>
       <p:sp>
         <p:nvSpPr>
-          <p:cNvPr id="17421" name="Rounded Rectangle 17420"/>
+          <p:cNvPr id="17424" name="Rounded Rectangle 17423"/>
           <p:cNvSpPr/>
           <p:nvPr/>
         </p:nvSpPr>
         <p:spPr>
           <a:xfrm>
-            <a:off x="4741164" y="2395728"/>
-            <a:ext cx="1248156" cy="566928"/>
+            <a:off x="4741164" y="2816352"/>
+            <a:ext cx="1248156" cy="420624"/>
           </a:xfrm>
           <a:prstGeom prst="roundRect">
             <a:avLst>
@@ -8035,7 +8216,7 @@
           </a:fontRef>
         </p:style>
         <p:txBody>
-          <a:bodyPr rtlCol="0" anchor="ctr" wrap="square" lIns="36576" rIns="36576" tIns="36576" bIns="36576"/>
+          <a:bodyPr rtlCol="0" anchor="ctr" wrap="square" lIns="18288" rIns="18288" tIns="18288" bIns="18288"/>
           <a:lstStyle/>
           <a:p>
             <a:pPr algn="ctr">
@@ -8044,16 +8225,7 @@
               </a:spcAft>
             </a:pPr>
             <a:r>
-              <a:rPr sz="1100" b="0" i="0">
-                <a:solidFill>
-                  <a:srgbClr val="2E7D32"/>
-                </a:solidFill>
-                <a:latin typeface="Arial"/>
-              </a:rPr>
-              <a:t>✓ </a:t>
-            </a:r>
-            <a:r>
-              <a:rPr sz="1100" b="1" i="0">
+              <a:rPr sz="1050" b="1" i="0">
                 <a:solidFill>
                   <a:srgbClr val="1F3864"/>
                 </a:solidFill>
@@ -8069,7 +8241,7 @@
               </a:spcAft>
             </a:pPr>
             <a:r>
-              <a:rPr sz="1100" b="0" i="0">
+              <a:rPr sz="1050" b="0" i="0">
                 <a:solidFill>
                   <a:srgbClr val="1F3864"/>
                 </a:solidFill>
@@ -8082,13 +8254,13 @@
       </p:sp>
       <p:sp>
         <p:nvSpPr>
-          <p:cNvPr id="17422" name="Right Arrow 17421"/>
+          <p:cNvPr id="17425" name="Right Arrow 17424"/>
           <p:cNvSpPr/>
           <p:nvPr/>
         </p:nvSpPr>
         <p:spPr>
           <a:xfrm>
-            <a:off x="6021324" y="2606040"/>
+            <a:off x="6021324" y="2953512"/>
             <a:ext cx="146304" cy="146304"/>
           </a:xfrm>
           <a:prstGeom prst="rightArrow">
@@ -8126,14 +8298,14 @@
       </p:sp>
       <p:sp>
         <p:nvSpPr>
-          <p:cNvPr id="17423" name="Rounded Rectangle 17422"/>
+          <p:cNvPr id="17426" name="Rounded Rectangle 17425"/>
           <p:cNvSpPr/>
           <p:nvPr/>
         </p:nvSpPr>
         <p:spPr>
           <a:xfrm>
-            <a:off x="6199632" y="2395728"/>
-            <a:ext cx="1248156" cy="566928"/>
+            <a:off x="6199632" y="2816352"/>
+            <a:ext cx="1248156" cy="420624"/>
           </a:xfrm>
           <a:prstGeom prst="roundRect">
             <a:avLst>
@@ -8163,7 +8335,7 @@
           </a:fontRef>
         </p:style>
         <p:txBody>
-          <a:bodyPr rtlCol="0" anchor="ctr" wrap="square" lIns="36576" rIns="36576" tIns="36576" bIns="36576"/>
+          <a:bodyPr rtlCol="0" anchor="ctr" wrap="square" lIns="18288" rIns="18288" tIns="18288" bIns="18288"/>
           <a:lstStyle/>
           <a:p>
             <a:pPr algn="ctr">
@@ -8172,16 +8344,7 @@
               </a:spcAft>
             </a:pPr>
             <a:r>
-              <a:rPr sz="1100" b="0" i="0">
-                <a:solidFill>
-                  <a:srgbClr val="2E7D32"/>
-                </a:solidFill>
-                <a:latin typeface="Arial"/>
-              </a:rPr>
-              <a:t>✓ </a:t>
-            </a:r>
-            <a:r>
-              <a:rPr sz="1100" b="1" i="0">
+              <a:rPr sz="1050" b="1" i="0">
                 <a:solidFill>
                   <a:srgbClr val="1F3864"/>
                 </a:solidFill>
@@ -8197,7 +8360,7 @@
               </a:spcAft>
             </a:pPr>
             <a:r>
-              <a:rPr sz="1100" b="0" i="0">
+              <a:rPr sz="1050" b="0" i="0">
                 <a:solidFill>
                   <a:srgbClr val="1F3864"/>
                 </a:solidFill>
@@ -8210,13 +8373,13 @@
       </p:sp>
       <p:sp>
         <p:nvSpPr>
-          <p:cNvPr id="17424" name="Right Arrow 17423"/>
+          <p:cNvPr id="17427" name="Right Arrow 17426"/>
           <p:cNvSpPr/>
           <p:nvPr/>
         </p:nvSpPr>
         <p:spPr>
           <a:xfrm>
-            <a:off x="7479792" y="2606040"/>
+            <a:off x="7479792" y="2953512"/>
             <a:ext cx="146304" cy="146304"/>
           </a:xfrm>
           <a:prstGeom prst="rightArrow">
@@ -8254,14 +8417,14 @@
       </p:sp>
       <p:sp>
         <p:nvSpPr>
-          <p:cNvPr id="17425" name="Rounded Rectangle 17424"/>
+          <p:cNvPr id="17428" name="Rounded Rectangle 17427"/>
           <p:cNvSpPr/>
           <p:nvPr/>
         </p:nvSpPr>
         <p:spPr>
           <a:xfrm>
-            <a:off x="7658100" y="2395728"/>
-            <a:ext cx="1248156" cy="566928"/>
+            <a:off x="7658100" y="2816352"/>
+            <a:ext cx="1248156" cy="420624"/>
           </a:xfrm>
           <a:prstGeom prst="roundRect">
             <a:avLst>
@@ -8291,7 +8454,7 @@
           </a:fontRef>
         </p:style>
         <p:txBody>
-          <a:bodyPr rtlCol="0" anchor="ctr" wrap="square" lIns="36576" rIns="36576" tIns="36576" bIns="36576"/>
+          <a:bodyPr rtlCol="0" anchor="ctr" wrap="square" lIns="18288" rIns="18288" tIns="18288" bIns="18288"/>
           <a:lstStyle/>
           <a:p>
             <a:pPr algn="ctr">
@@ -8300,16 +8463,7 @@
               </a:spcAft>
             </a:pPr>
             <a:r>
-              <a:rPr sz="1100" b="0" i="0">
-                <a:solidFill>
-                  <a:srgbClr val="2E7D32"/>
-                </a:solidFill>
-                <a:latin typeface="Arial"/>
-              </a:rPr>
-              <a:t>✓ </a:t>
-            </a:r>
-            <a:r>
-              <a:rPr sz="1100" b="1" i="0">
+              <a:rPr sz="1050" b="1" i="0">
                 <a:solidFill>
                   <a:srgbClr val="1F3864"/>
                 </a:solidFill>
@@ -8325,7 +8479,7 @@
               </a:spcAft>
             </a:pPr>
             <a:r>
-              <a:rPr sz="1100" b="0" i="0">
+              <a:rPr sz="1050" b="0" i="0">
                 <a:solidFill>
                   <a:srgbClr val="1F3864"/>
                 </a:solidFill>
@@ -8338,13 +8492,13 @@
       </p:sp>
       <p:sp>
         <p:nvSpPr>
-          <p:cNvPr id="17426" name="Right Arrow 17425"/>
+          <p:cNvPr id="17429" name="Right Arrow 17428"/>
           <p:cNvSpPr/>
           <p:nvPr/>
         </p:nvSpPr>
         <p:spPr>
           <a:xfrm>
-            <a:off x="8938260" y="2606040"/>
+            <a:off x="8938260" y="2953512"/>
             <a:ext cx="146304" cy="146304"/>
           </a:xfrm>
           <a:prstGeom prst="rightArrow">
@@ -8382,14 +8536,14 @@
       </p:sp>
       <p:sp>
         <p:nvSpPr>
-          <p:cNvPr id="17427" name="Rounded Rectangle 17426"/>
+          <p:cNvPr id="17430" name="Rounded Rectangle 17429"/>
           <p:cNvSpPr/>
           <p:nvPr/>
         </p:nvSpPr>
         <p:spPr>
           <a:xfrm>
-            <a:off x="9116568" y="2395728"/>
-            <a:ext cx="1248156" cy="566928"/>
+            <a:off x="9116568" y="2816352"/>
+            <a:ext cx="1248156" cy="420624"/>
           </a:xfrm>
           <a:prstGeom prst="roundRect">
             <a:avLst>
@@ -8419,7 +8573,7 @@
           </a:fontRef>
         </p:style>
         <p:txBody>
-          <a:bodyPr rtlCol="0" anchor="ctr" wrap="square" lIns="36576" rIns="36576" tIns="36576" bIns="36576"/>
+          <a:bodyPr rtlCol="0" anchor="ctr" wrap="square" lIns="18288" rIns="18288" tIns="18288" bIns="18288"/>
           <a:lstStyle/>
           <a:p>
             <a:pPr algn="ctr">
@@ -8428,37 +8582,28 @@
               </a:spcAft>
             </a:pPr>
             <a:r>
-              <a:rPr sz="1100" b="0" i="0">
+              <a:rPr sz="1050" b="1" i="0">
                 <a:solidFill>
                   <a:srgbClr val="FFFFFF"/>
                 </a:solidFill>
                 <a:latin typeface="Arial"/>
               </a:rPr>
-              <a:t>✓ </a:t>
-            </a:r>
-            <a:r>
-              <a:rPr sz="1100" b="1" i="0">
+              <a:t>Ordered rules</a:t>
+            </a:r>
+          </a:p>
+          <a:p>
+            <a:pPr algn="ctr">
+              <a:spcAft>
+                <a:spcPts val="0"/>
+              </a:spcAft>
+            </a:pPr>
+            <a:r>
+              <a:rPr sz="1050" b="0" i="0">
                 <a:solidFill>
                   <a:srgbClr val="FFFFFF"/>
                 </a:solidFill>
                 <a:latin typeface="Arial"/>
               </a:rPr>
-              <a:t>Ordered rules</a:t>
-            </a:r>
-          </a:p>
-          <a:p>
-            <a:pPr algn="ctr">
-              <a:spcAft>
-                <a:spcPts val="0"/>
-              </a:spcAft>
-            </a:pPr>
-            <a:r>
-              <a:rPr sz="1100" b="0" i="0">
-                <a:solidFill>
-                  <a:srgbClr val="FFFFFF"/>
-                </a:solidFill>
-                <a:latin typeface="Arial"/>
-              </a:rPr>
               <a:t>R0–R6</a:t>
             </a:r>
           </a:p>
@@ -8466,13 +8611,13 @@
       </p:sp>
       <p:sp>
         <p:nvSpPr>
-          <p:cNvPr id="17428" name="Right Arrow 17427"/>
+          <p:cNvPr id="17431" name="Right Arrow 17430"/>
           <p:cNvSpPr/>
           <p:nvPr/>
         </p:nvSpPr>
         <p:spPr>
           <a:xfrm>
-            <a:off x="10396728" y="2606040"/>
+            <a:off x="10396728" y="2953512"/>
             <a:ext cx="146304" cy="146304"/>
           </a:xfrm>
           <a:prstGeom prst="rightArrow">
@@ -8510,14 +8655,14 @@
       </p:sp>
       <p:sp>
         <p:nvSpPr>
-          <p:cNvPr id="17429" name="Rounded Rectangle 17428"/>
+          <p:cNvPr id="17432" name="Rounded Rectangle 17431"/>
           <p:cNvSpPr/>
           <p:nvPr/>
         </p:nvSpPr>
         <p:spPr>
           <a:xfrm>
-            <a:off x="10575036" y="2395728"/>
-            <a:ext cx="1248156" cy="566928"/>
+            <a:off x="10575036" y="2816352"/>
+            <a:ext cx="1248156" cy="420624"/>
           </a:xfrm>
           <a:prstGeom prst="roundRect">
             <a:avLst>
@@ -8547,7 +8692,7 @@
           </a:fontRef>
         </p:style>
         <p:txBody>
-          <a:bodyPr rtlCol="0" anchor="ctr" wrap="square" lIns="36576" rIns="36576" tIns="36576" bIns="36576"/>
+          <a:bodyPr rtlCol="0" anchor="ctr" wrap="square" lIns="18288" rIns="18288" tIns="18288" bIns="18288"/>
           <a:lstStyle/>
           <a:p>
             <a:pPr algn="ctr">
@@ -8556,16 +8701,7 @@
               </a:spcAft>
             </a:pPr>
             <a:r>
-              <a:rPr sz="1100" b="0" i="0">
-                <a:solidFill>
-                  <a:srgbClr val="2E7D32"/>
-                </a:solidFill>
-                <a:latin typeface="Arial"/>
-              </a:rPr>
-              <a:t>✓ </a:t>
-            </a:r>
-            <a:r>
-              <a:rPr sz="1100" b="1" i="0">
+              <a:rPr sz="1050" b="1" i="0">
                 <a:solidFill>
                   <a:srgbClr val="1F3864"/>
                 </a:solidFill>
@@ -8581,7 +8717,7 @@
               </a:spcAft>
             </a:pPr>
             <a:r>
-              <a:rPr sz="1100" b="0" i="0">
+              <a:rPr sz="1050" b="0" i="0">
                 <a:solidFill>
                   <a:srgbClr val="1F3864"/>
                 </a:solidFill>
@@ -8594,13 +8730,13 @@
       </p:sp>
       <p:sp>
         <p:nvSpPr>
-          <p:cNvPr id="17430" name="TextBox 17429"/>
+          <p:cNvPr id="17433" name="TextBox 17432"/>
           <p:cNvSpPr txBox="1"/>
           <p:nvPr/>
         </p:nvSpPr>
         <p:spPr>
           <a:xfrm>
-            <a:off x="365760" y="3072384"/>
+            <a:off x="365760" y="3291840"/>
             <a:ext cx="5669280" cy="274320"/>
           </a:xfrm>
           <a:prstGeom prst="rect">
@@ -8633,13 +8769,13 @@
       </p:sp>
       <p:sp>
         <p:nvSpPr>
-          <p:cNvPr id="17431" name="TextBox 17430"/>
+          <p:cNvPr id="17434" name="TextBox 17433"/>
           <p:cNvSpPr txBox="1"/>
           <p:nvPr/>
         </p:nvSpPr>
         <p:spPr>
           <a:xfrm>
-            <a:off x="365760" y="3364992"/>
+            <a:off x="365760" y="3566160"/>
             <a:ext cx="384048" cy="228600"/>
           </a:xfrm>
           <a:prstGeom prst="rect">
@@ -8659,7 +8795,7 @@
               </a:spcAft>
             </a:pPr>
             <a:r>
-              <a:rPr sz="1100" b="1" i="0">
+              <a:rPr sz="1200" b="1" i="0">
                 <a:solidFill>
                   <a:srgbClr val="1F3864"/>
                 </a:solidFill>
@@ -8672,13 +8808,13 @@
       </p:sp>
       <p:sp>
         <p:nvSpPr>
-          <p:cNvPr id="17432" name="TextBox 17431"/>
+          <p:cNvPr id="17435" name="TextBox 17434"/>
           <p:cNvSpPr txBox="1"/>
           <p:nvPr/>
         </p:nvSpPr>
         <p:spPr>
           <a:xfrm>
-            <a:off x="749808" y="3364992"/>
+            <a:off x="749808" y="3566160"/>
             <a:ext cx="4343400" cy="228600"/>
           </a:xfrm>
           <a:prstGeom prst="rect">
@@ -8698,7 +8834,7 @@
               </a:spcAft>
             </a:pPr>
             <a:r>
-              <a:rPr sz="1150" b="0" i="0">
+              <a:rPr sz="1200" b="0" i="0">
                 <a:solidFill>
                   <a:srgbClr val="262626"/>
                 </a:solidFill>
@@ -8711,14 +8847,14 @@
       </p:sp>
       <p:sp>
         <p:nvSpPr>
-          <p:cNvPr id="17433" name="Rounded Rectangle 17432"/>
+          <p:cNvPr id="17436" name="Rounded Rectangle 17435"/>
           <p:cNvSpPr/>
           <p:nvPr/>
         </p:nvSpPr>
         <p:spPr>
           <a:xfrm>
-            <a:off x="5120640" y="3374136"/>
-            <a:ext cx="896112" cy="210312"/>
+            <a:off x="5120640" y="3584448"/>
+            <a:ext cx="896112" cy="201168"/>
           </a:xfrm>
           <a:prstGeom prst="roundRect">
             <a:avLst>
@@ -8770,13 +8906,13 @@
       </p:sp>
       <p:sp>
         <p:nvSpPr>
-          <p:cNvPr id="17434" name="TextBox 17433"/>
+          <p:cNvPr id="17437" name="TextBox 17436"/>
           <p:cNvSpPr txBox="1"/>
           <p:nvPr/>
         </p:nvSpPr>
         <p:spPr>
           <a:xfrm>
-            <a:off x="365760" y="3630168"/>
+            <a:off x="365760" y="3808476"/>
             <a:ext cx="384048" cy="228600"/>
           </a:xfrm>
           <a:prstGeom prst="rect">
@@ -8796,7 +8932,7 @@
               </a:spcAft>
             </a:pPr>
             <a:r>
-              <a:rPr sz="1100" b="1" i="0">
+              <a:rPr sz="1200" b="1" i="0">
                 <a:solidFill>
                   <a:srgbClr val="1F3864"/>
                 </a:solidFill>
@@ -8809,13 +8945,13 @@
       </p:sp>
       <p:sp>
         <p:nvSpPr>
-          <p:cNvPr id="17435" name="TextBox 17434"/>
+          <p:cNvPr id="17438" name="TextBox 17437"/>
           <p:cNvSpPr txBox="1"/>
           <p:nvPr/>
         </p:nvSpPr>
         <p:spPr>
           <a:xfrm>
-            <a:off x="749808" y="3630168"/>
+            <a:off x="749808" y="3808476"/>
             <a:ext cx="4343400" cy="228600"/>
           </a:xfrm>
           <a:prstGeom prst="rect">
@@ -8835,7 +8971,7 @@
               </a:spcAft>
             </a:pPr>
             <a:r>
-              <a:rPr sz="1150" b="0" i="0">
+              <a:rPr sz="1200" b="0" i="0">
                 <a:solidFill>
                   <a:srgbClr val="262626"/>
                 </a:solidFill>
@@ -8848,14 +8984,14 @@
       </p:sp>
       <p:sp>
         <p:nvSpPr>
-          <p:cNvPr id="17436" name="Rounded Rectangle 17435"/>
+          <p:cNvPr id="17439" name="Rounded Rectangle 17438"/>
           <p:cNvSpPr/>
           <p:nvPr/>
         </p:nvSpPr>
         <p:spPr>
           <a:xfrm>
-            <a:off x="5120640" y="3639312"/>
-            <a:ext cx="896112" cy="210312"/>
+            <a:off x="5120640" y="3826763"/>
+            <a:ext cx="896112" cy="201168"/>
           </a:xfrm>
           <a:prstGeom prst="roundRect">
             <a:avLst>
@@ -8907,13 +9043,13 @@
       </p:sp>
       <p:sp>
         <p:nvSpPr>
-          <p:cNvPr id="17437" name="TextBox 17436"/>
+          <p:cNvPr id="17440" name="TextBox 17439"/>
           <p:cNvSpPr txBox="1"/>
           <p:nvPr/>
         </p:nvSpPr>
         <p:spPr>
           <a:xfrm>
-            <a:off x="365760" y="3895344"/>
+            <a:off x="365760" y="4050791"/>
             <a:ext cx="384048" cy="228600"/>
           </a:xfrm>
           <a:prstGeom prst="rect">
@@ -8933,7 +9069,7 @@
               </a:spcAft>
             </a:pPr>
             <a:r>
-              <a:rPr sz="1100" b="1" i="0">
+              <a:rPr sz="1200" b="1" i="0">
                 <a:solidFill>
                   <a:srgbClr val="1F3864"/>
                 </a:solidFill>
@@ -8946,13 +9082,13 @@
       </p:sp>
       <p:sp>
         <p:nvSpPr>
-          <p:cNvPr id="17438" name="TextBox 17437"/>
+          <p:cNvPr id="17441" name="TextBox 17440"/>
           <p:cNvSpPr txBox="1"/>
           <p:nvPr/>
         </p:nvSpPr>
         <p:spPr>
           <a:xfrm>
-            <a:off x="749808" y="3895344"/>
+            <a:off x="749808" y="4050791"/>
             <a:ext cx="4343400" cy="228600"/>
           </a:xfrm>
           <a:prstGeom prst="rect">
@@ -8972,27 +9108,27 @@
               </a:spcAft>
             </a:pPr>
             <a:r>
-              <a:rPr sz="1150" b="0" i="0">
+              <a:rPr sz="1200" b="0" i="0">
                 <a:solidFill>
                   <a:srgbClr val="262626"/>
                 </a:solidFill>
                 <a:latin typeface="Arial"/>
               </a:rPr>
-              <a:t>drift rate &gt; safety slope, even at the optimistic end of the range</a:t>
-            </a:r>
-          </a:p>
-        </p:txBody>
-      </p:sp>
-      <p:sp>
-        <p:nvSpPr>
-          <p:cNvPr id="17439" name="Rounded Rectangle 17438"/>
+              <a:t>drift rate &gt; safety slope at optimistic end (Module B)</a:t>
+            </a:r>
+          </a:p>
+        </p:txBody>
+      </p:sp>
+      <p:sp>
+        <p:nvSpPr>
+          <p:cNvPr id="17442" name="Rounded Rectangle 17441"/>
           <p:cNvSpPr/>
           <p:nvPr/>
         </p:nvSpPr>
         <p:spPr>
           <a:xfrm>
-            <a:off x="5120640" y="3904487"/>
-            <a:ext cx="896112" cy="210312"/>
+            <a:off x="5120640" y="4069079"/>
+            <a:ext cx="896112" cy="201168"/>
           </a:xfrm>
           <a:prstGeom prst="roundRect">
             <a:avLst>
@@ -9044,13 +9180,13 @@
       </p:sp>
       <p:sp>
         <p:nvSpPr>
-          <p:cNvPr id="17440" name="TextBox 17439"/>
+          <p:cNvPr id="17443" name="TextBox 17442"/>
           <p:cNvSpPr txBox="1"/>
           <p:nvPr/>
         </p:nvSpPr>
         <p:spPr>
           <a:xfrm>
-            <a:off x="365760" y="4160520"/>
+            <a:off x="365760" y="4293108"/>
             <a:ext cx="384048" cy="228600"/>
           </a:xfrm>
           <a:prstGeom prst="rect">
@@ -9070,7 +9206,7 @@
               </a:spcAft>
             </a:pPr>
             <a:r>
-              <a:rPr sz="1100" b="1" i="0">
+              <a:rPr sz="1200" b="1" i="0">
                 <a:solidFill>
                   <a:srgbClr val="1F3864"/>
                 </a:solidFill>
@@ -9083,13 +9219,13 @@
       </p:sp>
       <p:sp>
         <p:nvSpPr>
-          <p:cNvPr id="17441" name="TextBox 17440"/>
+          <p:cNvPr id="17444" name="TextBox 17443"/>
           <p:cNvSpPr txBox="1"/>
           <p:nvPr/>
         </p:nvSpPr>
         <p:spPr>
           <a:xfrm>
-            <a:off x="749808" y="4160520"/>
+            <a:off x="749808" y="4293108"/>
             <a:ext cx="4343400" cy="228600"/>
           </a:xfrm>
           <a:prstGeom prst="rect">
@@ -9109,27 +9245,27 @@
               </a:spcAft>
             </a:pPr>
             <a:r>
-              <a:rPr sz="1150" b="0" i="0">
+              <a:rPr sz="1200" b="0" i="0">
                 <a:solidFill>
                   <a:srgbClr val="262626"/>
                 </a:solidFill>
                 <a:latin typeface="Arial"/>
               </a:rPr>
-              <a:t>point or pessimistic end reaches the slope or the limit</a:t>
-            </a:r>
-          </a:p>
-        </p:txBody>
-      </p:sp>
-      <p:sp>
-        <p:nvSpPr>
-          <p:cNvPr id="17442" name="Rounded Rectangle 17441"/>
+              <a:t>point or pessimistic end reaches slope or limit (B)</a:t>
+            </a:r>
+          </a:p>
+        </p:txBody>
+      </p:sp>
+      <p:sp>
+        <p:nvSpPr>
+          <p:cNvPr id="17445" name="Rounded Rectangle 17444"/>
           <p:cNvSpPr/>
           <p:nvPr/>
         </p:nvSpPr>
         <p:spPr>
           <a:xfrm>
-            <a:off x="5120640" y="4169663"/>
-            <a:ext cx="896112" cy="210312"/>
+            <a:off x="5120640" y="4311396"/>
+            <a:ext cx="896112" cy="201168"/>
           </a:xfrm>
           <a:prstGeom prst="roundRect">
             <a:avLst>
@@ -9181,13 +9317,13 @@
       </p:sp>
       <p:sp>
         <p:nvSpPr>
-          <p:cNvPr id="17443" name="TextBox 17442"/>
+          <p:cNvPr id="17446" name="TextBox 17445"/>
           <p:cNvSpPr txBox="1"/>
           <p:nvPr/>
         </p:nvSpPr>
         <p:spPr>
           <a:xfrm>
-            <a:off x="365760" y="4425696"/>
+            <a:off x="365760" y="4535424"/>
             <a:ext cx="384048" cy="228600"/>
           </a:xfrm>
           <a:prstGeom prst="rect">
@@ -9207,7 +9343,7 @@
               </a:spcAft>
             </a:pPr>
             <a:r>
-              <a:rPr sz="1100" b="1" i="0">
+              <a:rPr sz="1200" b="1" i="0">
                 <a:solidFill>
                   <a:srgbClr val="1F3864"/>
                 </a:solidFill>
@@ -9220,13 +9356,13 @@
       </p:sp>
       <p:sp>
         <p:nvSpPr>
-          <p:cNvPr id="17444" name="TextBox 17443"/>
+          <p:cNvPr id="17447" name="TextBox 17446"/>
           <p:cNvSpPr txBox="1"/>
           <p:nvPr/>
         </p:nvSpPr>
         <p:spPr>
           <a:xfrm>
-            <a:off x="749808" y="4425696"/>
+            <a:off x="749808" y="4535424"/>
             <a:ext cx="4343400" cy="228600"/>
           </a:xfrm>
           <a:prstGeom prst="rect">
@@ -9246,27 +9382,27 @@
               </a:spcAft>
             </a:pPr>
             <a:r>
-              <a:rPr sz="1150" b="0" i="0">
+              <a:rPr sz="1200" b="0" i="0">
                 <a:solidFill>
                   <a:srgbClr val="262626"/>
                 </a:solidFill>
                 <a:latin typeface="Arial"/>
               </a:rPr>
-              <a:t>level and drift both ≥ 6 robust σ from the lot (DPAT)</a:t>
-            </a:r>
-          </a:p>
-        </p:txBody>
-      </p:sp>
-      <p:sp>
-        <p:nvSpPr>
-          <p:cNvPr id="17445" name="Rounded Rectangle 17444"/>
+              <a:t>level and drift both ≥ 6 robust σ (Module A, DPAT)</a:t>
+            </a:r>
+          </a:p>
+        </p:txBody>
+      </p:sp>
+      <p:sp>
+        <p:nvSpPr>
+          <p:cNvPr id="17448" name="Rounded Rectangle 17447"/>
           <p:cNvSpPr/>
           <p:nvPr/>
         </p:nvSpPr>
         <p:spPr>
           <a:xfrm>
-            <a:off x="5120640" y="4434840"/>
-            <a:ext cx="896112" cy="210312"/>
+            <a:off x="5120640" y="4553712"/>
+            <a:ext cx="896112" cy="201168"/>
           </a:xfrm>
           <a:prstGeom prst="roundRect">
             <a:avLst>
@@ -9318,13 +9454,13 @@
       </p:sp>
       <p:sp>
         <p:nvSpPr>
-          <p:cNvPr id="17446" name="TextBox 17445"/>
+          <p:cNvPr id="17449" name="TextBox 17448"/>
           <p:cNvSpPr txBox="1"/>
           <p:nvPr/>
         </p:nvSpPr>
         <p:spPr>
           <a:xfrm>
-            <a:off x="365760" y="4690872"/>
+            <a:off x="365760" y="4777740"/>
             <a:ext cx="384048" cy="228600"/>
           </a:xfrm>
           <a:prstGeom prst="rect">
@@ -9344,7 +9480,7 @@
               </a:spcAft>
             </a:pPr>
             <a:r>
-              <a:rPr sz="1100" b="1" i="0">
+              <a:rPr sz="1200" b="1" i="0">
                 <a:solidFill>
                   <a:srgbClr val="1F3864"/>
                 </a:solidFill>
@@ -9357,13 +9493,13 @@
       </p:sp>
       <p:sp>
         <p:nvSpPr>
-          <p:cNvPr id="17447" name="TextBox 17446"/>
+          <p:cNvPr id="17450" name="TextBox 17449"/>
           <p:cNvSpPr txBox="1"/>
           <p:nvPr/>
         </p:nvSpPr>
         <p:spPr>
           <a:xfrm>
-            <a:off x="749808" y="4690872"/>
+            <a:off x="749808" y="4777740"/>
             <a:ext cx="4343400" cy="228600"/>
           </a:xfrm>
           <a:prstGeom prst="rect">
@@ -9383,27 +9519,27 @@
               </a:spcAft>
             </a:pPr>
             <a:r>
-              <a:rPr sz="1150" b="0" i="0">
+              <a:rPr sz="1200" b="0" i="0">
                 <a:solidFill>
                   <a:srgbClr val="262626"/>
                 </a:solidFill>
                 <a:latin typeface="Arial"/>
               </a:rPr>
-              <a:t>level or drift ≥ 2.5 robust σ from the lot</a:t>
-            </a:r>
-          </a:p>
-        </p:txBody>
-      </p:sp>
-      <p:sp>
-        <p:nvSpPr>
-          <p:cNvPr id="17448" name="Rounded Rectangle 17447"/>
+              <a:t>level or drift ≥ 2.5 robust σ (Module A)</a:t>
+            </a:r>
+          </a:p>
+        </p:txBody>
+      </p:sp>
+      <p:sp>
+        <p:nvSpPr>
+          <p:cNvPr id="17451" name="Rounded Rectangle 17450"/>
           <p:cNvSpPr/>
           <p:nvPr/>
         </p:nvSpPr>
         <p:spPr>
           <a:xfrm>
-            <a:off x="5120640" y="4700016"/>
-            <a:ext cx="896112" cy="210312"/>
+            <a:off x="5120640" y="4796027"/>
+            <a:ext cx="896112" cy="201168"/>
           </a:xfrm>
           <a:prstGeom prst="roundRect">
             <a:avLst>
@@ -9455,13 +9591,13 @@
       </p:sp>
       <p:sp>
         <p:nvSpPr>
-          <p:cNvPr id="17449" name="TextBox 17448"/>
+          <p:cNvPr id="17452" name="TextBox 17451"/>
           <p:cNvSpPr txBox="1"/>
           <p:nvPr/>
         </p:nvSpPr>
         <p:spPr>
           <a:xfrm>
-            <a:off x="365760" y="4956048"/>
+            <a:off x="365760" y="5020056"/>
             <a:ext cx="384048" cy="228600"/>
           </a:xfrm>
           <a:prstGeom prst="rect">
@@ -9481,7 +9617,7 @@
               </a:spcAft>
             </a:pPr>
             <a:r>
-              <a:rPr sz="1100" b="1" i="0">
+              <a:rPr sz="1200" b="1" i="0">
                 <a:solidFill>
                   <a:srgbClr val="1F3864"/>
                 </a:solidFill>
@@ -9494,13 +9630,13 @@
       </p:sp>
       <p:sp>
         <p:nvSpPr>
-          <p:cNvPr id="17450" name="TextBox 17449"/>
+          <p:cNvPr id="17453" name="TextBox 17452"/>
           <p:cNvSpPr txBox="1"/>
           <p:nvPr/>
         </p:nvSpPr>
         <p:spPr>
           <a:xfrm>
-            <a:off x="749808" y="4956048"/>
+            <a:off x="749808" y="5020056"/>
             <a:ext cx="4343400" cy="228600"/>
           </a:xfrm>
           <a:prstGeom prst="rect">
@@ -9520,7 +9656,7 @@
               </a:spcAft>
             </a:pPr>
             <a:r>
-              <a:rPr sz="1150" b="0" i="0">
+              <a:rPr sz="1200" b="0" i="0">
                 <a:solidFill>
                   <a:srgbClr val="262626"/>
                 </a:solidFill>
@@ -9533,14 +9669,14 @@
       </p:sp>
       <p:sp>
         <p:nvSpPr>
-          <p:cNvPr id="17451" name="Rounded Rectangle 17450"/>
+          <p:cNvPr id="17454" name="Rounded Rectangle 17453"/>
           <p:cNvSpPr/>
           <p:nvPr/>
         </p:nvSpPr>
         <p:spPr>
           <a:xfrm>
-            <a:off x="5120640" y="4965192"/>
-            <a:ext cx="896112" cy="210312"/>
+            <a:off x="5120640" y="5038344"/>
+            <a:ext cx="896112" cy="201168"/>
           </a:xfrm>
           <a:prstGeom prst="roundRect">
             <a:avLst>
@@ -9592,14 +9728,14 @@
       </p:sp>
       <p:sp>
         <p:nvSpPr>
-          <p:cNvPr id="17452" name="Rectangle 17451"/>
+          <p:cNvPr id="17455" name="Rectangle 17454"/>
           <p:cNvSpPr/>
           <p:nvPr/>
         </p:nvSpPr>
         <p:spPr>
           <a:xfrm>
-            <a:off x="365760" y="5266944"/>
-            <a:ext cx="5669280" cy="1005840"/>
+            <a:off x="365760" y="5340096"/>
+            <a:ext cx="5669280" cy="676656"/>
           </a:xfrm>
           <a:prstGeom prst="rect">
             <a:avLst/>
@@ -9627,7 +9763,7 @@
           </a:fontRef>
         </p:style>
         <p:txBody>
-          <a:bodyPr rtlCol="0" anchor="t" wrap="square" lIns="73152" rIns="73152" tIns="73152" bIns="73152"/>
+          <a:bodyPr rtlCol="0" anchor="ctr" wrap="square" lIns="73152" rIns="73152" tIns="73152" bIns="73152"/>
           <a:lstStyle/>
           <a:p>
             <a:pPr algn="l">
@@ -9636,7 +9772,7 @@
               </a:spcAft>
             </a:pPr>
             <a:r>
-              <a:rPr sz="1100" b="1" i="0">
+              <a:rPr sz="1150" b="1" i="0">
                 <a:solidFill>
                   <a:srgbClr val="262626"/>
                 </a:solidFill>
@@ -9645,95 +9781,52 @@
               <a:t>robust z</a:t>
             </a:r>
             <a:r>
-              <a:rPr sz="1100" b="0" i="0">
+              <a:rPr sz="1150" b="0" i="0">
                 <a:solidFill>
                   <a:srgbClr val="262626"/>
                 </a:solidFill>
                 <a:latin typeface="Arial"/>
               </a:rPr>
-              <a:t> = (x − lot median) / (IQR / 1.35)   </a:t>
-            </a:r>
-            <a:r>
-              <a:rPr sz="1100" b="1" i="0">
+              <a:t> = (x − median)/(IQR/1.35) · 6 σ DPAT, 2.5 σ tuned on validation</a:t>
+            </a:r>
+          </a:p>
+          <a:p>
+            <a:pPr algn="l">
+              <a:spcAft>
+                <a:spcPts val="300"/>
+              </a:spcAft>
+            </a:pPr>
+            <a:r>
+              <a:rPr sz="1150" b="1" i="0">
                 <a:solidFill>
                   <a:srgbClr val="262626"/>
                 </a:solidFill>
                 <a:latin typeface="Arial"/>
               </a:rPr>
-              <a:t>drift rate</a:t>
-            </a:r>
-            <a:r>
-              <a:rPr sz="1100" b="0" i="0">
+              <a:t>safety slope</a:t>
+            </a:r>
+            <a:r>
+              <a:rPr sz="1150" b="0" i="0">
                 <a:solidFill>
                   <a:srgbClr val="262626"/>
                 </a:solidFill>
                 <a:latin typeface="Arial"/>
               </a:rPr>
-              <a:t> r = (Ŷ168 − V0) / 168 h</a:t>
-            </a:r>
-          </a:p>
-          <a:p>
-            <a:pPr algn="l">
-              <a:spcAft>
-                <a:spcPts val="300"/>
-              </a:spcAft>
-            </a:pPr>
-            <a:r>
-              <a:rPr sz="1100" b="1" i="0">
-                <a:solidFill>
-                  <a:srgbClr val="262626"/>
-                </a:solidFill>
-                <a:latin typeface="Arial"/>
-              </a:rPr>
-              <a:t>safety slope</a:t>
-            </a:r>
-            <a:r>
-              <a:rPr sz="1100" b="0" i="0">
-                <a:solidFill>
-                  <a:srgbClr val="262626"/>
-                </a:solidFill>
-                <a:latin typeface="Arial"/>
-              </a:rPr>
-              <a:t> s = Δallow / 168 h; Δallow = 15 % of V0 per parameter (site config; PS leaves it undefined)</a:t>
-            </a:r>
-          </a:p>
-          <a:p>
-            <a:pPr algn="l">
-              <a:spcAft>
-                <a:spcPts val="300"/>
-              </a:spcAft>
-            </a:pPr>
-            <a:r>
-              <a:rPr sz="1100" b="1" i="0">
-                <a:solidFill>
-                  <a:srgbClr val="C55A11"/>
-                </a:solidFill>
-                <a:latin typeface="Arial"/>
-              </a:rPr>
-              <a:t>PS scoring: </a:t>
-            </a:r>
-            <a:r>
-              <a:rPr sz="1100" b="0" i="0">
-                <a:solidFill>
-                  <a:srgbClr val="262626"/>
-                </a:solidFill>
-                <a:latin typeface="Arial"/>
-              </a:rPr>
-              <a:t>REVIEW and REJECT both count as flagged — a missed defect costs more than a review.</a:t>
-            </a:r>
-          </a:p>
-        </p:txBody>
-      </p:sp>
-      <p:sp>
-        <p:nvSpPr>
-          <p:cNvPr id="17453" name="TextBox 17452"/>
+              <a:t> s = Δallow/168 h, Δallow = 15 % V0 · drift r = (Ŷ168 − V0)/168 h</a:t>
+            </a:r>
+          </a:p>
+        </p:txBody>
+      </p:sp>
+      <p:sp>
+        <p:nvSpPr>
+          <p:cNvPr id="17456" name="TextBox 17455"/>
           <p:cNvSpPr txBox="1"/>
           <p:nvPr/>
         </p:nvSpPr>
         <p:spPr>
           <a:xfrm>
-            <a:off x="6263640" y="3072384"/>
-            <a:ext cx="5559552" cy="274320"/>
+            <a:off x="365760" y="6035040"/>
+            <a:ext cx="5669280" cy="256032"/>
           </a:xfrm>
           <a:prstGeom prst="rect">
             <a:avLst/>
@@ -9752,6 +9845,45 @@
               </a:spcAft>
             </a:pPr>
             <a:r>
+              <a:rPr sz="1000" b="0" i="0">
+                <a:solidFill>
+                  <a:srgbClr val="595959"/>
+                </a:solidFill>
+                <a:latin typeface="Arial"/>
+              </a:rPr>
+              <a:t>* vs persistence (predict V168 = V24). Flagged = REVIEW 10.4 % + REJECT 0.6 %.</a:t>
+            </a:r>
+          </a:p>
+        </p:txBody>
+      </p:sp>
+      <p:sp>
+        <p:nvSpPr>
+          <p:cNvPr id="17457" name="TextBox 17456"/>
+          <p:cNvSpPr txBox="1"/>
+          <p:nvPr/>
+        </p:nvSpPr>
+        <p:spPr>
+          <a:xfrm>
+            <a:off x="6263640" y="3291840"/>
+            <a:ext cx="5559552" cy="274320"/>
+          </a:xfrm>
+          <a:prstGeom prst="rect">
+            <a:avLst/>
+          </a:prstGeom>
+          <a:noFill/>
+        </p:spPr>
+        <p:txBody>
+          <a:bodyPr wrap="square" anchor="t" lIns="36576" rIns="36576" tIns="36576" bIns="36576">
+            <a:spAutoFit/>
+          </a:bodyPr>
+          <a:lstStyle/>
+          <a:p>
+            <a:pPr algn="l">
+              <a:spcAft>
+                <a:spcPts val="0"/>
+              </a:spcAft>
+            </a:pPr>
+            <a:r>
               <a:rPr sz="1300" b="1" i="0">
                 <a:solidFill>
                   <a:srgbClr val="1F3864"/>
@@ -9765,15 +9897,15 @@
       </p:sp>
       <p:graphicFrame>
         <p:nvGraphicFramePr>
-          <p:cNvPr id="17454" name="Table 17453"/>
+          <p:cNvPr id="17458" name="Table 17457"/>
           <p:cNvGraphicFramePr>
             <a:graphicFrameLocks noGrp="1"/>
           </p:cNvGraphicFramePr>
           <p:nvPr/>
         </p:nvGraphicFramePr>
         <p:xfrm>
-          <a:off x="6263640" y="3364992"/>
-          <a:ext cx="5559552" cy="1715413"/>
+          <a:off x="6263640" y="3566160"/>
+          <a:ext cx="5559552" cy="1664208"/>
         </p:xfrm>
         <a:graphic>
           <a:graphicData uri="http://schemas.openxmlformats.org/drawingml/2006/table">
@@ -9782,25 +9914,26 @@
                 <a:tableStyleId>{5C22544A-7EE6-4342-B048-85BDC9FD1C3A}</a:tableStyleId>
               </a:tblPr>
               <a:tblGrid>
-                <a:gridCol w="2377440"/>
-                <a:gridCol w="914400"/>
-                <a:gridCol w="1170432"/>
-                <a:gridCol w="1097280"/>
+                <a:gridCol w="2039112"/>
+                <a:gridCol w="804672"/>
+                <a:gridCol w="960120"/>
+                <a:gridCol w="932688"/>
+                <a:gridCol w="822960"/>
               </a:tblGrid>
-              <a:tr h="245059">
+              <a:tr h="237744">
                 <a:tc>
                   <a:txBody>
                     <a:bodyPr wrap="square"/>
                     <a:lstStyle/>
                     <a:p>
                       <a:r>
-                        <a:rPr sz="1100" b="1" i="0">
+                        <a:rPr sz="1200" b="1" i="0">
                           <a:solidFill>
                             <a:srgbClr val="FFFFFF"/>
                           </a:solidFill>
                           <a:latin typeface="Arial"/>
                         </a:rPr>
-                        <a:t>Cumulative layers (E1–E6)</a:t>
+                        <a:t>Cumulative layers</a:t>
                       </a:r>
                     </a:p>
                   </a:txBody>
@@ -9816,7 +9949,7 @@
                     <a:lstStyle/>
                     <a:p>
                       <a:r>
-                        <a:rPr sz="1100" b="1" i="0">
+                        <a:rPr sz="1200" b="1" i="0">
                           <a:solidFill>
                             <a:srgbClr val="FFFFFF"/>
                           </a:solidFill>
@@ -9838,13 +9971,13 @@
                     <a:lstStyle/>
                     <a:p>
                       <a:r>
-                        <a:rPr sz="1100" b="1" i="0">
+                        <a:rPr sz="1200" b="1" i="0">
                           <a:solidFill>
                             <a:srgbClr val="FFFFFF"/>
                           </a:solidFill>
                           <a:latin typeface="Arial"/>
                         </a:rPr>
-                        <a:t>Review rate</a:t>
+                        <a:t>Precision</a:t>
                       </a:r>
                     </a:p>
                   </a:txBody>
@@ -9860,13 +9993,35 @@
                     <a:lstStyle/>
                     <a:p>
                       <a:r>
-                        <a:rPr sz="1100" b="1" i="0">
+                        <a:rPr sz="1200" b="1" i="0">
                           <a:solidFill>
                             <a:srgbClr val="FFFFFF"/>
                           </a:solidFill>
                           <a:latin typeface="Arial"/>
                         </a:rPr>
-                        <a:t>False reject</a:t>
+                        <a:t>REVIEW %</a:t>
+                      </a:r>
+                    </a:p>
+                  </a:txBody>
+                  <a:tcPr marL="54864" marR="54864" marT="22860" marB="22860" anchor="ctr">
+                    <a:solidFill>
+                      <a:srgbClr val="1F3864"/>
+                    </a:solidFill>
+                  </a:tcPr>
+                </a:tc>
+                <a:tc>
+                  <a:txBody>
+                    <a:bodyPr wrap="square"/>
+                    <a:lstStyle/>
+                    <a:p>
+                      <a:r>
+                        <a:rPr sz="1200" b="1" i="0">
+                          <a:solidFill>
+                            <a:srgbClr val="FFFFFF"/>
+                          </a:solidFill>
+                          <a:latin typeface="Arial"/>
+                        </a:rPr>
+                        <a:t>False rej.</a:t>
                       </a:r>
                     </a:p>
                   </a:txBody>
@@ -9877,14 +10032,14 @@
                   </a:tcPr>
                 </a:tc>
               </a:tr>
-              <a:tr h="245059">
+              <a:tr h="237744">
                 <a:tc>
                   <a:txBody>
                     <a:bodyPr wrap="square"/>
                     <a:lstStyle/>
                     <a:p>
                       <a:r>
-                        <a:rPr sz="1100" b="0" i="0">
+                        <a:rPr sz="1200" b="0" i="0">
                           <a:solidFill>
                             <a:srgbClr val="262626"/>
                           </a:solidFill>
@@ -9907,7 +10062,7 @@
                     <a:p>
                       <a:pPr algn="ctr"/>
                       <a:r>
-                        <a:rPr sz="1100" b="0" i="0">
+                        <a:rPr sz="1200" b="0" i="0">
                           <a:solidFill>
                             <a:srgbClr val="262626"/>
                           </a:solidFill>
@@ -9930,7 +10085,30 @@
                     <a:p>
                       <a:pPr algn="ctr"/>
                       <a:r>
-                        <a:rPr sz="1100" b="0" i="0">
+                        <a:rPr sz="1200" b="0" i="0">
+                          <a:solidFill>
+                            <a:srgbClr val="262626"/>
+                          </a:solidFill>
+                          <a:latin typeface="Arial"/>
+                        </a:rPr>
+                        <a:t>0.125</a:t>
+                      </a:r>
+                    </a:p>
+                  </a:txBody>
+                  <a:tcPr marL="54864" marR="54864" marT="22860" marB="22860" anchor="ctr">
+                    <a:solidFill>
+                      <a:srgbClr val="FFFFFF"/>
+                    </a:solidFill>
+                  </a:tcPr>
+                </a:tc>
+                <a:tc>
+                  <a:txBody>
+                    <a:bodyPr wrap="square"/>
+                    <a:lstStyle/>
+                    <a:p>
+                      <a:pPr algn="ctr"/>
+                      <a:r>
+                        <a:rPr sz="1200" b="0" i="0">
                           <a:solidFill>
                             <a:srgbClr val="262626"/>
                           </a:solidFill>
@@ -9953,7 +10131,7 @@
                     <a:p>
                       <a:pPr algn="ctr"/>
                       <a:r>
-                        <a:rPr sz="1100" b="0" i="0">
+                        <a:rPr sz="1200" b="0" i="0">
                           <a:solidFill>
                             <a:srgbClr val="262626"/>
                           </a:solidFill>
@@ -9970,14 +10148,14 @@
                   </a:tcPr>
                 </a:tc>
               </a:tr>
-              <a:tr h="245059">
+              <a:tr h="237744">
                 <a:tc>
                   <a:txBody>
                     <a:bodyPr wrap="square"/>
                     <a:lstStyle/>
                     <a:p>
                       <a:r>
-                        <a:rPr sz="1100" b="0" i="0">
+                        <a:rPr sz="1200" b="0" i="0">
                           <a:solidFill>
                             <a:srgbClr val="262626"/>
                           </a:solidFill>
@@ -10000,7 +10178,7 @@
                     <a:p>
                       <a:pPr algn="ctr"/>
                       <a:r>
-                        <a:rPr sz="1100" b="0" i="0">
+                        <a:rPr sz="1200" b="0" i="0">
                           <a:solidFill>
                             <a:srgbClr val="262626"/>
                           </a:solidFill>
@@ -10023,7 +10201,30 @@
                     <a:p>
                       <a:pPr algn="ctr"/>
                       <a:r>
-                        <a:rPr sz="1100" b="0" i="0">
+                        <a:rPr sz="1200" b="0" i="0">
+                          <a:solidFill>
+                            <a:srgbClr val="262626"/>
+                          </a:solidFill>
+                          <a:latin typeface="Arial"/>
+                        </a:rPr>
+                        <a:t>0.085</a:t>
+                      </a:r>
+                    </a:p>
+                  </a:txBody>
+                  <a:tcPr marL="54864" marR="54864" marT="22860" marB="22860" anchor="ctr">
+                    <a:solidFill>
+                      <a:srgbClr val="F0F0F0"/>
+                    </a:solidFill>
+                  </a:tcPr>
+                </a:tc>
+                <a:tc>
+                  <a:txBody>
+                    <a:bodyPr wrap="square"/>
+                    <a:lstStyle/>
+                    <a:p>
+                      <a:pPr algn="ctr"/>
+                      <a:r>
+                        <a:rPr sz="1200" b="0" i="0">
                           <a:solidFill>
                             <a:srgbClr val="262626"/>
                           </a:solidFill>
@@ -10046,7 +10247,7 @@
                     <a:p>
                       <a:pPr algn="ctr"/>
                       <a:r>
-                        <a:rPr sz="1100" b="0" i="0">
+                        <a:rPr sz="1200" b="0" i="0">
                           <a:solidFill>
                             <a:srgbClr val="262626"/>
                           </a:solidFill>
@@ -10063,14 +10264,14 @@
                   </a:tcPr>
                 </a:tc>
               </a:tr>
-              <a:tr h="245059">
+              <a:tr h="237744">
                 <a:tc>
                   <a:txBody>
                     <a:bodyPr wrap="square"/>
                     <a:lstStyle/>
                     <a:p>
                       <a:r>
-                        <a:rPr sz="1100" b="0" i="0">
+                        <a:rPr sz="1200" b="0" i="0">
                           <a:solidFill>
                             <a:srgbClr val="262626"/>
                           </a:solidFill>
@@ -10093,7 +10294,7 @@
                     <a:p>
                       <a:pPr algn="ctr"/>
                       <a:r>
-                        <a:rPr sz="1100" b="0" i="0">
+                        <a:rPr sz="1200" b="0" i="0">
                           <a:solidFill>
                             <a:srgbClr val="262626"/>
                           </a:solidFill>
@@ -10116,7 +10317,30 @@
                     <a:p>
                       <a:pPr algn="ctr"/>
                       <a:r>
-                        <a:rPr sz="1100" b="0" i="0">
+                        <a:rPr sz="1200" b="0" i="0">
+                          <a:solidFill>
+                            <a:srgbClr val="262626"/>
+                          </a:solidFill>
+                          <a:latin typeface="Arial"/>
+                        </a:rPr>
+                        <a:t>0.213</a:t>
+                      </a:r>
+                    </a:p>
+                  </a:txBody>
+                  <a:tcPr marL="54864" marR="54864" marT="22860" marB="22860" anchor="ctr">
+                    <a:solidFill>
+                      <a:srgbClr val="FFFFFF"/>
+                    </a:solidFill>
+                  </a:tcPr>
+                </a:tc>
+                <a:tc>
+                  <a:txBody>
+                    <a:bodyPr wrap="square"/>
+                    <a:lstStyle/>
+                    <a:p>
+                      <a:pPr algn="ctr"/>
+                      <a:r>
+                        <a:rPr sz="1200" b="0" i="0">
                           <a:solidFill>
                             <a:srgbClr val="262626"/>
                           </a:solidFill>
@@ -10139,7 +10363,7 @@
                     <a:p>
                       <a:pPr algn="ctr"/>
                       <a:r>
-                        <a:rPr sz="1100" b="0" i="0">
+                        <a:rPr sz="1200" b="0" i="0">
                           <a:solidFill>
                             <a:srgbClr val="262626"/>
                           </a:solidFill>
@@ -10156,14 +10380,14 @@
                   </a:tcPr>
                 </a:tc>
               </a:tr>
-              <a:tr h="245059">
+              <a:tr h="237744">
                 <a:tc>
                   <a:txBody>
                     <a:bodyPr wrap="square"/>
                     <a:lstStyle/>
                     <a:p>
                       <a:r>
-                        <a:rPr sz="1100" b="0" i="0">
+                        <a:rPr sz="1200" b="0" i="0">
                           <a:solidFill>
                             <a:srgbClr val="262626"/>
                           </a:solidFill>
@@ -10186,7 +10410,7 @@
                     <a:p>
                       <a:pPr algn="ctr"/>
                       <a:r>
-                        <a:rPr sz="1100" b="0" i="0">
+                        <a:rPr sz="1200" b="0" i="0">
                           <a:solidFill>
                             <a:srgbClr val="262626"/>
                           </a:solidFill>
@@ -10209,7 +10433,30 @@
                     <a:p>
                       <a:pPr algn="ctr"/>
                       <a:r>
-                        <a:rPr sz="1100" b="0" i="0">
+                        <a:rPr sz="1200" b="0" i="0">
+                          <a:solidFill>
+                            <a:srgbClr val="262626"/>
+                          </a:solidFill>
+                          <a:latin typeface="Arial"/>
+                        </a:rPr>
+                        <a:t>0.213</a:t>
+                      </a:r>
+                    </a:p>
+                  </a:txBody>
+                  <a:tcPr marL="54864" marR="54864" marT="22860" marB="22860" anchor="ctr">
+                    <a:solidFill>
+                      <a:srgbClr val="F0F0F0"/>
+                    </a:solidFill>
+                  </a:tcPr>
+                </a:tc>
+                <a:tc>
+                  <a:txBody>
+                    <a:bodyPr wrap="square"/>
+                    <a:lstStyle/>
+                    <a:p>
+                      <a:pPr algn="ctr"/>
+                      <a:r>
+                        <a:rPr sz="1200" b="0" i="0">
                           <a:solidFill>
                             <a:srgbClr val="262626"/>
                           </a:solidFill>
@@ -10232,7 +10479,7 @@
                     <a:p>
                       <a:pPr algn="ctr"/>
                       <a:r>
-                        <a:rPr sz="1100" b="0" i="0">
+                        <a:rPr sz="1200" b="0" i="0">
                           <a:solidFill>
                             <a:srgbClr val="262626"/>
                           </a:solidFill>
@@ -10249,14 +10496,14 @@
                   </a:tcPr>
                 </a:tc>
               </a:tr>
-              <a:tr h="245059">
+              <a:tr h="237744">
                 <a:tc>
                   <a:txBody>
                     <a:bodyPr wrap="square"/>
                     <a:lstStyle/>
                     <a:p>
                       <a:r>
-                        <a:rPr sz="1100" b="0" i="0">
+                        <a:rPr sz="1200" b="0" i="0">
                           <a:solidFill>
                             <a:srgbClr val="262626"/>
                           </a:solidFill>
@@ -10279,7 +10526,7 @@
                     <a:p>
                       <a:pPr algn="ctr"/>
                       <a:r>
-                        <a:rPr sz="1100" b="0" i="0">
+                        <a:rPr sz="1200" b="0" i="0">
                           <a:solidFill>
                             <a:srgbClr val="262626"/>
                           </a:solidFill>
@@ -10302,7 +10549,30 @@
                     <a:p>
                       <a:pPr algn="ctr"/>
                       <a:r>
-                        <a:rPr sz="1100" b="0" i="0">
+                        <a:rPr sz="1200" b="0" i="0">
+                          <a:solidFill>
+                            <a:srgbClr val="262626"/>
+                          </a:solidFill>
+                          <a:latin typeface="Arial"/>
+                        </a:rPr>
+                        <a:t>0.213</a:t>
+                      </a:r>
+                    </a:p>
+                  </a:txBody>
+                  <a:tcPr marL="54864" marR="54864" marT="22860" marB="22860" anchor="ctr">
+                    <a:solidFill>
+                      <a:srgbClr val="FFFFFF"/>
+                    </a:solidFill>
+                  </a:tcPr>
+                </a:tc>
+                <a:tc>
+                  <a:txBody>
+                    <a:bodyPr wrap="square"/>
+                    <a:lstStyle/>
+                    <a:p>
+                      <a:pPr algn="ctr"/>
+                      <a:r>
+                        <a:rPr sz="1200" b="0" i="0">
                           <a:solidFill>
                             <a:srgbClr val="262626"/>
                           </a:solidFill>
@@ -10325,7 +10595,7 @@
                     <a:p>
                       <a:pPr algn="ctr"/>
                       <a:r>
-                        <a:rPr sz="1100" b="0" i="0">
+                        <a:rPr sz="1200" b="0" i="0">
                           <a:solidFill>
                             <a:srgbClr val="262626"/>
                           </a:solidFill>
@@ -10342,14 +10612,14 @@
                   </a:tcPr>
                 </a:tc>
               </a:tr>
-              <a:tr h="245059">
+              <a:tr h="237744">
                 <a:tc>
                   <a:txBody>
                     <a:bodyPr wrap="square"/>
                     <a:lstStyle/>
                     <a:p>
                       <a:r>
-                        <a:rPr sz="1100" b="1" i="0">
+                        <a:rPr sz="1200" b="1" i="0">
                           <a:solidFill>
                             <a:srgbClr val="262626"/>
                           </a:solidFill>
@@ -10371,7 +10641,7 @@
                     <a:lstStyle/>
                     <a:p>
                       <a:r>
-                        <a:rPr sz="1100" b="1" i="0">
+                        <a:rPr sz="1200" b="1" i="0">
                           <a:solidFill>
                             <a:srgbClr val="262626"/>
                           </a:solidFill>
@@ -10392,8 +10662,31 @@
                     <a:bodyPr wrap="square"/>
                     <a:lstStyle/>
                     <a:p>
+                      <a:pPr algn="ctr"/>
                       <a:r>
-                        <a:rPr sz="1100" b="1" i="0">
+                        <a:rPr sz="1200" b="0" i="0">
+                          <a:solidFill>
+                            <a:srgbClr val="262626"/>
+                          </a:solidFill>
+                          <a:latin typeface="Arial"/>
+                        </a:rPr>
+                        <a:t>0.092</a:t>
+                      </a:r>
+                    </a:p>
+                  </a:txBody>
+                  <a:tcPr marL="54864" marR="54864" marT="22860" marB="22860" anchor="ctr">
+                    <a:solidFill>
+                      <a:srgbClr val="F0F0F0"/>
+                    </a:solidFill>
+                  </a:tcPr>
+                </a:tc>
+                <a:tc>
+                  <a:txBody>
+                    <a:bodyPr wrap="square"/>
+                    <a:lstStyle/>
+                    <a:p>
+                      <a:r>
+                        <a:rPr sz="1200" b="1" i="0">
                           <a:solidFill>
                             <a:srgbClr val="262626"/>
                           </a:solidFill>
@@ -10416,7 +10709,7 @@
                     <a:p>
                       <a:pPr algn="ctr"/>
                       <a:r>
-                        <a:rPr sz="1100" b="0" i="0">
+                        <a:rPr sz="1200" b="0" i="0">
                           <a:solidFill>
                             <a:srgbClr val="262626"/>
                           </a:solidFill>
@@ -10439,14 +10732,14 @@
       </p:graphicFrame>
       <p:sp>
         <p:nvSpPr>
-          <p:cNvPr id="17455" name="TextBox 17454"/>
+          <p:cNvPr id="17459" name="TextBox 17458"/>
           <p:cNvSpPr txBox="1"/>
           <p:nvPr/>
         </p:nvSpPr>
         <p:spPr>
           <a:xfrm>
-            <a:off x="6263640" y="5138928"/>
-            <a:ext cx="5559552" cy="1170432"/>
+            <a:off x="6263640" y="5303520"/>
+            <a:ext cx="5559552" cy="987552"/>
           </a:xfrm>
           <a:prstGeom prst="rect">
             <a:avLst/>
@@ -10461,76 +10754,26 @@
           <a:p>
             <a:pPr algn="l">
               <a:spcAft>
-                <a:spcPts val="300"/>
-              </a:spcAft>
-            </a:pPr>
-            <a:r>
-              <a:rPr sz="1100" b="1" i="0">
+                <a:spcPts val="0"/>
+              </a:spcAft>
+            </a:pPr>
+            <a:r>
+              <a:rPr sz="1150" b="1" i="0">
+                <a:solidFill>
+                  <a:srgbClr val="1F3864"/>
+                </a:solidFill>
+                <a:latin typeface="Arial"/>
+              </a:rPr>
+              <a:t>Where the gain comes from: </a:t>
+            </a:r>
+            <a:r>
+              <a:rPr sz="1150" b="0" i="0">
                 <a:solidFill>
                   <a:srgbClr val="262626"/>
                 </a:solidFill>
                 <a:latin typeface="Arial"/>
               </a:rPr>
-              <a:t>168 h forecast MAE beats persistence</a:t>
-            </a:r>
-            <a:r>
-              <a:rPr sz="1100" b="0" i="0">
-                <a:solidFill>
-                  <a:srgbClr val="262626"/>
-                </a:solidFill>
-                <a:latin typeface="Arial"/>
-              </a:rPr>
-              <a:t> (validation lots): Iddq 0.297 vs 0.338 µA · tpd 0.047 vs 0.050 ns. Range coverage on test 0.887 (target 0.90).</a:t>
-            </a:r>
-          </a:p>
-          <a:p>
-            <a:pPr algn="l">
-              <a:spcAft>
-                <a:spcPts val="300"/>
-              </a:spcAft>
-            </a:pPr>
-            <a:r>
-              <a:rPr sz="1100" b="1" i="0">
-                <a:solidFill>
-                  <a:srgbClr val="C55A11"/>
-                </a:solidFill>
-                <a:latin typeface="Arial"/>
-              </a:rPr>
-              <a:t>Honest finding: </a:t>
-            </a:r>
-            <a:r>
-              <a:rPr sz="1100" b="0" i="0">
-                <a:solidFill>
-                  <a:srgbClr val="262626"/>
-                </a:solidFill>
-                <a:latin typeface="Arial"/>
-              </a:rPr>
-              <a:t>the gain comes from lot drift; forecast and range added no detection here. Recall target 0.95 not yet met; 30 positives, so rates are imprecise.</a:t>
-            </a:r>
-          </a:p>
-          <a:p>
-            <a:pPr algn="l">
-              <a:spcAft>
-                <a:spcPts val="300"/>
-              </a:spcAft>
-            </a:pPr>
-            <a:r>
-              <a:rPr sz="1100" b="1" i="0">
-                <a:solidFill>
-                  <a:srgbClr val="262626"/>
-                </a:solidFill>
-                <a:latin typeface="Arial"/>
-              </a:rPr>
-              <a:t>No LSTM: </a:t>
-            </a:r>
-            <a:r>
-              <a:rPr sz="1100" b="0" i="0">
-                <a:solidFill>
-                  <a:srgbClr val="262626"/>
-                </a:solidFill>
-                <a:latin typeface="Arial"/>
-              </a:rPr>
-              <a:t>2–4 readings per part — sequence models add opacity, not accuracy.</a:t>
+              <a:t>lot drift (4 → 20 of 30); ordered rules add +4 but raise REVIEW 3.4 % → 10.4 %. Precision falls as doubt goes to REVIEW, yet the flagged queue is ≈ 7× richer in drifting parts than the lot. The forecast adds no detection alone; it feeds R2/R3.</a:t>
             </a:r>
           </a:p>
         </p:txBody>
@@ -10920,7 +11163,7 @@
         </p:nvGraphicFramePr>
         <p:xfrm>
           <a:off x="365760" y="1051560"/>
-          <a:ext cx="7040880" cy="5102352"/>
+          <a:ext cx="6812280" cy="4828032"/>
         </p:xfrm>
         <a:graphic>
           <a:graphicData uri="http://schemas.openxmlformats.org/drawingml/2006/table">
@@ -10929,10 +11172,10 @@
                 <a:tableStyleId>{5C22544A-7EE6-4342-B048-85BDC9FD1C3A}</a:tableStyleId>
               </a:tblPr>
               <a:tblGrid>
-                <a:gridCol w="2834640"/>
+                <a:gridCol w="2606040"/>
                 <a:gridCol w="4206240"/>
               </a:tblGrid>
-              <a:tr h="566928">
+              <a:tr h="603504">
                 <a:tc>
                   <a:txBody>
                     <a:bodyPr wrap="square"/>
@@ -10978,7 +11221,7 @@
                   </a:tcPr>
                 </a:tc>
               </a:tr>
-              <a:tr h="566928">
+              <a:tr h="603504">
                 <a:tc>
                   <a:txBody>
                     <a:bodyPr wrap="square"/>
@@ -11013,7 +11256,7 @@
                           </a:solidFill>
                           <a:latin typeface="Arial"/>
                         </a:rPr>
-                        <a:t>Synthetic PS-shaped lots, always labelled; the site-fit script recalibrates on ISRO history (built)</a:t>
+                        <a:t>Synthetic PS-shaped lots, always labelled; site-fit script recalibrates on ISRO history (built; untested on real ISRO data)</a:t>
                       </a:r>
                     </a:p>
                   </a:txBody>
@@ -11024,7 +11267,7 @@
                   </a:tcPr>
                 </a:tc>
               </a:tr>
-              <a:tr h="566928">
+              <a:tr h="603504">
                 <a:tc>
                   <a:txBody>
                     <a:bodyPr wrap="square"/>
@@ -11037,7 +11280,7 @@
                           </a:solidFill>
                           <a:latin typeface="Arial"/>
                         </a:rPr>
-                        <a:t>Hidden ground truth; scoring metric undefined</a:t>
+                        <a:t>PS names three metrics but no formula</a:t>
                       </a:r>
                     </a:p>
                   </a:txBody>
@@ -11059,7 +11302,7 @@
                           </a:solidFill>
                           <a:latin typeface="Arial"/>
                         </a:rPr>
-                        <a:t>REVIEW + REJECT count as flagged; report recall at a fixed review budget and 168 h MAE vs persistence</a:t>
+                        <a:t>Report all three: recall at a stated review share, 168 h MAE vs persistence, a rule-based explanation per part</a:t>
                       </a:r>
                     </a:p>
                   </a:txBody>
@@ -11070,7 +11313,7 @@
                   </a:tcPr>
                 </a:tc>
               </a:tr>
-              <a:tr h="566928">
+              <a:tr h="603504">
                 <a:tc>
                   <a:txBody>
                     <a:bodyPr wrap="square"/>
@@ -11105,7 +11348,7 @@
                           </a:solidFill>
                           <a:latin typeface="Arial"/>
                         </a:rPr>
-                        <a:t>2 held-out behaviour families sealed by SHA-256 on 26 Sep 2026, before detector code; test lots evaluated once; leakage tests</a:t>
+                        <a:t>Two extra behaviour families written outside the repo, sealed by SHA-256 on 26 Sep 2026, not yet opened — the final unseen test. Now: test lots scored once; leakage tests</a:t>
                       </a:r>
                     </a:p>
                   </a:txBody>
@@ -11116,7 +11359,7 @@
                   </a:tcPr>
                 </a:tc>
               </a:tr>
-              <a:tr h="566928">
+              <a:tr h="603504">
                 <a:tc>
                   <a:txBody>
                     <a:bodyPr wrap="square"/>
@@ -11162,7 +11405,7 @@
                   </a:tcPr>
                 </a:tc>
               </a:tr>
-              <a:tr h="566928">
+              <a:tr h="603504">
                 <a:tc>
                   <a:txBody>
                     <a:bodyPr wrap="square"/>
@@ -11197,7 +11440,7 @@
                           </a:solidFill>
                           <a:latin typeface="Arial"/>
                         </a:rPr>
-                        <a:t>Δallow per parameter in site config (default 15 % of V0); sensitivity grid reported</a:t>
+                        <a:t>One Δallow per site config (15 % of V0 in the prototype); per-parameter ESCC detail-spec Δ limits are the next step</a:t>
                       </a:r>
                     </a:p>
                   </a:txBody>
@@ -11208,7 +11451,7 @@
                   </a:tcPr>
                 </a:tc>
               </a:tr>
-              <a:tr h="566928">
+              <a:tr h="603504">
                 <a:tc>
                   <a:txBody>
                     <a:bodyPr wrap="square"/>
@@ -11254,7 +11497,7 @@
                   </a:tcPr>
                 </a:tc>
               </a:tr>
-              <a:tr h="566928">
+              <a:tr h="603504">
                 <a:tc>
                   <a:txBody>
                     <a:bodyPr wrap="square"/>
@@ -11267,7 +11510,7 @@
                           </a:solidFill>
                           <a:latin typeface="Arial"/>
                         </a:rPr>
-                        <a:t>One glitchy 24 h reading → false REJECT (all 6 test false rejects)</a:t>
+                        <a:t>Single glitchy 24 h reading → false REJECT: 8 of 14 REJECTs correct (6 false = 0.3 % of part-parameters)</a:t>
                       </a:r>
                     </a:p>
                   </a:txBody>
@@ -11289,7 +11532,7 @@
                           </a:solidFill>
                           <a:latin typeface="Arial"/>
                         </a:rPr>
-                        <a:t>Proposed v2: single-jump cases go to REVIEW, not REJECT — to be tested on fresh pre-registered data</a:t>
+                        <a:t>REJECT is advisory: the engineer confirms (human-in-the-loop). v2: single-jump cases → REVIEW, tested on fresh pre-registered data</a:t>
                       </a:r>
                     </a:p>
                   </a:txBody>
@@ -11300,52 +11543,6 @@
                   </a:tcPr>
                 </a:tc>
               </a:tr>
-              <a:tr h="566928">
-                <a:tc>
-                  <a:txBody>
-                    <a:bodyPr wrap="square"/>
-                    <a:lstStyle/>
-                    <a:p>
-                      <a:r>
-                        <a:rPr sz="1150" b="1" i="0">
-                          <a:solidFill>
-                            <a:srgbClr val="262626"/>
-                          </a:solidFill>
-                          <a:latin typeface="Arial"/>
-                        </a:rPr>
-                        <a:t>Different tester formats and units</a:t>
-                      </a:r>
-                    </a:p>
-                  </a:txBody>
-                  <a:tcPr marL="54864" marR="54864" marT="22860" marB="22860" anchor="ctr">
-                    <a:solidFill>
-                      <a:srgbClr val="F0F0F0"/>
-                    </a:solidFill>
-                  </a:tcPr>
-                </a:tc>
-                <a:tc>
-                  <a:txBody>
-                    <a:bodyPr wrap="square"/>
-                    <a:lstStyle/>
-                    <a:p>
-                      <a:r>
-                        <a:rPr sz="1150" b="0" i="0">
-                          <a:solidFill>
-                            <a:srgbClr val="262626"/>
-                          </a:solidFill>
-                          <a:latin typeface="Arial"/>
-                        </a:rPr>
-                        <a:t>Column mapping + unit conversion from a site config file (built)</a:t>
-                      </a:r>
-                    </a:p>
-                  </a:txBody>
-                  <a:tcPr marL="54864" marR="54864" marT="22860" marB="22860" anchor="ctr">
-                    <a:solidFill>
-                      <a:srgbClr val="F0F0F0"/>
-                    </a:solidFill>
-                  </a:tcPr>
-                </a:tc>
-              </a:tr>
             </a:tbl>
           </a:graphicData>
         </a:graphic>
@@ -11358,8 +11555,8 @@
         </p:nvSpPr>
         <p:spPr>
           <a:xfrm>
-            <a:off x="7589520" y="1024128"/>
-            <a:ext cx="4206240" cy="274320"/>
+            <a:off x="7360920" y="1024128"/>
+            <a:ext cx="4462272" cy="274320"/>
           </a:xfrm>
           <a:prstGeom prst="rect">
             <a:avLst/>
@@ -11389,9 +11586,57 @@
           </a:p>
         </p:txBody>
       </p:sp>
+      <p:sp>
+        <p:nvSpPr>
+          <p:cNvPr id="17412" name="TextBox 17411"/>
+          <p:cNvSpPr txBox="1"/>
+          <p:nvPr/>
+        </p:nvSpPr>
+        <p:spPr>
+          <a:xfrm>
+            <a:off x="7360920" y="1298448"/>
+            <a:ext cx="4462272" cy="246888"/>
+          </a:xfrm>
+          <a:prstGeom prst="rect">
+            <a:avLst/>
+          </a:prstGeom>
+          <a:noFill/>
+        </p:spPr>
+        <p:txBody>
+          <a:bodyPr wrap="square" anchor="t" lIns="36576" rIns="36576" tIns="36576" bIns="36576">
+            <a:spAutoFit/>
+          </a:bodyPr>
+          <a:lstStyle/>
+          <a:p>
+            <a:pPr algn="l">
+              <a:spcAft>
+                <a:spcPts val="0"/>
+              </a:spcAft>
+            </a:pPr>
+            <a:r>
+              <a:rPr sz="1100" b="1" i="0">
+                <a:solidFill>
+                  <a:srgbClr val="1F3864"/>
+                </a:solidFill>
+                <a:latin typeface="Arial"/>
+              </a:rPr>
+              <a:t>What the QA engineer sees</a:t>
+            </a:r>
+            <a:r>
+              <a:rPr sz="1100" b="0" i="0">
+                <a:solidFill>
+                  <a:srgbClr val="595959"/>
+                </a:solidFill>
+                <a:latin typeface="Arial"/>
+              </a:rPr>
+              <a:t> · prototype, slide 2's part</a:t>
+            </a:r>
+          </a:p>
+        </p:txBody>
+      </p:sp>
       <p:pic>
         <p:nvPicPr>
-          <p:cNvPr id="17412" name="Picture 17411" descr="ui_run.png"/>
+          <p:cNvPr id="17413" name="Picture 17412" descr="card_crop.png"/>
           <p:cNvPicPr>
             <a:picLocks noChangeAspect="1"/>
           </p:cNvPicPr>
@@ -11405,8 +11650,8 @@
         </p:blipFill>
         <p:spPr>
           <a:xfrm>
-            <a:off x="7589520" y="1316736"/>
-            <a:ext cx="4233672" cy="1751864"/>
+            <a:off x="7360920" y="1554480"/>
+            <a:ext cx="4462272" cy="3065387"/>
           </a:xfrm>
           <a:prstGeom prst="rect">
             <a:avLst/>
@@ -11420,53 +11665,14 @@
       </p:pic>
       <p:sp>
         <p:nvSpPr>
-          <p:cNvPr id="17413" name="TextBox 17412"/>
-          <p:cNvSpPr txBox="1"/>
-          <p:nvPr/>
-        </p:nvSpPr>
-        <p:spPr>
-          <a:xfrm>
-            <a:off x="7589520" y="3081528"/>
-            <a:ext cx="4233672" cy="246888"/>
-          </a:xfrm>
-          <a:prstGeom prst="rect">
-            <a:avLst/>
-          </a:prstGeom>
-          <a:noFill/>
-        </p:spPr>
-        <p:txBody>
-          <a:bodyPr wrap="square" anchor="t" lIns="36576" rIns="36576" tIns="36576" bIns="36576">
-            <a:spAutoFit/>
-          </a:bodyPr>
-          <a:lstStyle/>
-          <a:p>
-            <a:pPr algn="l">
-              <a:spcAft>
-                <a:spcPts val="0"/>
-              </a:spcAft>
-            </a:pPr>
-            <a:r>
-              <a:rPr sz="1050" b="0" i="0">
-                <a:solidFill>
-                  <a:srgbClr val="595959"/>
-                </a:solidFill>
-                <a:latin typeface="Arial"/>
-              </a:rPr>
-              <a:t>Live service · run 20260929-035534 · replay → identical decisions</a:t>
-            </a:r>
-          </a:p>
-        </p:txBody>
-      </p:sp>
-      <p:sp>
-        <p:nvSpPr>
           <p:cNvPr id="17414" name="Rounded Rectangle 17413"/>
           <p:cNvSpPr/>
           <p:nvPr/>
         </p:nvSpPr>
         <p:spPr>
           <a:xfrm>
-            <a:off x="7589520" y="3364992"/>
-            <a:ext cx="4233672" cy="530352"/>
+            <a:off x="7360920" y="4663440"/>
+            <a:ext cx="4462272" cy="566928"/>
           </a:xfrm>
           <a:prstGeom prst="roundRect">
             <a:avLst>
@@ -11511,7 +11717,7 @@
                 </a:solidFill>
                 <a:latin typeface="Arial"/>
               </a:rPr>
-              <a:t>Technical  </a:t>
+              <a:t>Scale  </a:t>
             </a:r>
             <a:r>
               <a:rPr sz="1150" b="0" i="0">
@@ -11520,7 +11726,7 @@
                 </a:solidFill>
                 <a:latin typeface="Arial"/>
               </a:rPr>
-              <a:t>Standard PC, CPU only: 2,368 rows screened in 0.43 s (one recorded run).</a:t>
+              <a:t>2,368 → 118,400 part-parameters: 0.35 s → 14.2 s, linear (one PC; test lots replicated 50×).</a:t>
             </a:r>
           </a:p>
         </p:txBody>
@@ -11533,144 +11739,8 @@
         </p:nvSpPr>
         <p:spPr>
           <a:xfrm>
-            <a:off x="7589520" y="3950208"/>
-            <a:ext cx="4233672" cy="530352"/>
-          </a:xfrm>
-          <a:prstGeom prst="roundRect">
-            <a:avLst>
-              <a:gd name="adj" fmla="val 12000"/>
-            </a:avLst>
-          </a:prstGeom>
-          <a:solidFill>
-            <a:srgbClr val="E4EAF3"/>
-          </a:solidFill>
-          <a:ln>
-            <a:noFill/>
-          </a:ln>
-          <a:effectLst/>
-        </p:spPr>
-        <p:style>
-          <a:lnRef idx="1">
-            <a:schemeClr val="accent1"/>
-          </a:lnRef>
-          <a:fillRef idx="3">
-            <a:schemeClr val="accent1"/>
-          </a:fillRef>
-          <a:effectRef idx="2">
-            <a:schemeClr val="accent1"/>
-          </a:effectRef>
-          <a:fontRef idx="minor">
-            <a:schemeClr val="lt1"/>
-          </a:fontRef>
-        </p:style>
-        <p:txBody>
-          <a:bodyPr rtlCol="0" anchor="ctr" wrap="square" lIns="73152" rIns="73152" tIns="73152" bIns="73152"/>
-          <a:lstStyle/>
-          <a:p>
-            <a:pPr algn="l">
-              <a:spcAft>
-                <a:spcPts val="0"/>
-              </a:spcAft>
-            </a:pPr>
-            <a:r>
-              <a:rPr sz="1150" b="1" i="0">
-                <a:solidFill>
-                  <a:srgbClr val="1F3864"/>
-                </a:solidFill>
-                <a:latin typeface="Arial"/>
-              </a:rPr>
-              <a:t>Operational  </a:t>
-            </a:r>
-            <a:r>
-              <a:rPr sz="1150" b="0" i="0">
-                <a:solidFill>
-                  <a:srgbClr val="262626"/>
-                </a:solidFill>
-                <a:latin typeface="Arial"/>
-              </a:rPr>
-              <a:t>Engineer works a ranked REVIEW queue; overrides are logged beside the pipeline decision.</a:t>
-            </a:r>
-          </a:p>
-        </p:txBody>
-      </p:sp>
-      <p:sp>
-        <p:nvSpPr>
-          <p:cNvPr id="17416" name="Rounded Rectangle 17415"/>
-          <p:cNvSpPr/>
-          <p:nvPr/>
-        </p:nvSpPr>
-        <p:spPr>
-          <a:xfrm>
-            <a:off x="7589520" y="4535424"/>
-            <a:ext cx="4233672" cy="530352"/>
-          </a:xfrm>
-          <a:prstGeom prst="roundRect">
-            <a:avLst>
-              <a:gd name="adj" fmla="val 12000"/>
-            </a:avLst>
-          </a:prstGeom>
-          <a:solidFill>
-            <a:srgbClr val="E4EAF3"/>
-          </a:solidFill>
-          <a:ln>
-            <a:noFill/>
-          </a:ln>
-          <a:effectLst/>
-        </p:spPr>
-        <p:style>
-          <a:lnRef idx="1">
-            <a:schemeClr val="accent1"/>
-          </a:lnRef>
-          <a:fillRef idx="3">
-            <a:schemeClr val="accent1"/>
-          </a:fillRef>
-          <a:effectRef idx="2">
-            <a:schemeClr val="accent1"/>
-          </a:effectRef>
-          <a:fontRef idx="minor">
-            <a:schemeClr val="lt1"/>
-          </a:fontRef>
-        </p:style>
-        <p:txBody>
-          <a:bodyPr rtlCol="0" anchor="ctr" wrap="square" lIns="73152" rIns="73152" tIns="73152" bIns="73152"/>
-          <a:lstStyle/>
-          <a:p>
-            <a:pPr algn="l">
-              <a:spcAft>
-                <a:spcPts val="0"/>
-              </a:spcAft>
-            </a:pPr>
-            <a:r>
-              <a:rPr sz="1150" b="1" i="0">
-                <a:solidFill>
-                  <a:srgbClr val="1F3864"/>
-                </a:solidFill>
-                <a:latin typeface="Arial"/>
-              </a:rPr>
-              <a:t>Financial  </a:t>
-            </a:r>
-            <a:r>
-              <a:rPr sz="1150" b="0" i="0">
-                <a:solidFill>
-                  <a:srgbClr val="262626"/>
-                </a:solidFill>
-                <a:latin typeface="Arial"/>
-              </a:rPr>
-              <a:t>Open-source stack, no licence or cloud; data never leaves the facility.</a:t>
-            </a:r>
-          </a:p>
-        </p:txBody>
-      </p:sp>
-      <p:sp>
-        <p:nvSpPr>
-          <p:cNvPr id="17417" name="Rounded Rectangle 17416"/>
-          <p:cNvSpPr/>
-          <p:nvPr/>
-        </p:nvSpPr>
-        <p:spPr>
-          <a:xfrm>
-            <a:off x="7589520" y="5157216"/>
-            <a:ext cx="4233672" cy="1115568"/>
+            <a:off x="7360920" y="5303520"/>
+            <a:ext cx="4462272" cy="987552"/>
           </a:xfrm>
           <a:prstGeom prst="roundRect">
             <a:avLst>
@@ -11705,7 +11775,7 @@
           <a:p>
             <a:pPr algn="l">
               <a:spcAft>
-                <a:spcPts val="200"/>
+                <a:spcPts val="100"/>
               </a:spcAft>
             </a:pPr>
             <a:r>
@@ -11717,11 +11787,20 @@
               </a:rPr>
               <a:t>Built and verified</a:t>
             </a:r>
+            <a:r>
+              <a:rPr sz="1100" b="0" i="0">
+                <a:solidFill>
+                  <a:srgbClr val="262626"/>
+                </a:solidFill>
+                <a:latin typeface="Arial"/>
+              </a:rPr>
+              <a:t>  · offline, CPU only</a:t>
+            </a:r>
           </a:p>
           <a:p>
             <a:pPr algn="l">
               <a:spcAft>
-                <a:spcPts val="200"/>
+                <a:spcPts val="100"/>
               </a:spcAft>
             </a:pPr>
             <a:r>
@@ -11731,13 +11810,13 @@
                 </a:solidFill>
                 <a:latin typeface="Arial"/>
               </a:rPr>
-              <a:t>✓ all 7 layers   ✓ web UI + CLI   ✓ any-CSV ingest</a:t>
+              <a:t>✓ 8 stages ✓ web UI + CLI ✓ any column layout (site config)</a:t>
             </a:r>
           </a:p>
           <a:p>
             <a:pPr algn="l">
               <a:spcAft>
-                <a:spcPts val="200"/>
+                <a:spcPts val="100"/>
               </a:spcAft>
             </a:pPr>
             <a:r>
@@ -11747,32 +11826,23 @@
                 </a:solidFill>
                 <a:latin typeface="Arial"/>
               </a:rPr>
-              <a:t>✓ 111 automated tests pass   ✓ audit record + replay</a:t>
+              <a:t>✓ 111 tests ✓ audit record + replay → identical decisions</a:t>
             </a:r>
           </a:p>
           <a:p>
             <a:pPr algn="l">
               <a:spcAft>
-                <a:spcPts val="200"/>
-              </a:spcAft>
-            </a:pPr>
-            <a:r>
-              <a:rPr sz="1100" b="1" i="0">
-                <a:solidFill>
-                  <a:srgbClr val="262626"/>
-                </a:solidFill>
-                <a:latin typeface="Arial"/>
-              </a:rPr>
-              <a:t>Code: </a:t>
-            </a:r>
-            <a:r>
-              <a:rPr sz="1100" b="0" i="0">
+                <a:spcPts val="100"/>
+              </a:spcAft>
+            </a:pPr>
+            <a:r>
+              <a:rPr sz="1050" b="0" i="0">
                 <a:solidFill>
                   <a:srgbClr val="0070C0"/>
                 </a:solidFill>
                 <a:latin typeface="Arial"/>
               </a:rPr>
-              <a:t>github.com/Mrudula211/AgniDrishti</a:t>
+              <a:t>github.com/Mrudula211/AgniDrishti/tree/p1-synthetic-data</a:t>
             </a:r>
           </a:p>
         </p:txBody>
@@ -12191,7 +12261,7 @@
                 </a:solidFill>
                 <a:latin typeface="Arial"/>
               </a:rPr>
-              <a:t>Decide at hour 24 — with evidence</a:t>
+              <a:t>Same burn-in. The engineer sees risk at hour 24, with the evidence.</a:t>
             </a:r>
           </a:p>
         </p:txBody>
@@ -12468,7 +12538,7 @@
             </a:avLst>
           </a:prstGeom>
           <a:solidFill>
-            <a:srgbClr val="C55A11"/>
+            <a:srgbClr val="1F3864"/>
           </a:solidFill>
           <a:ln>
             <a:noFill/>
@@ -12527,7 +12597,7 @@
             </a:avLst>
           </a:prstGeom>
           <a:solidFill>
-            <a:srgbClr val="FBECE2"/>
+            <a:srgbClr val="E4EAF3"/>
           </a:solidFill>
           <a:ln>
             <a:noFill/>
@@ -12630,7 +12700,7 @@
             </a:avLst>
           </a:prstGeom>
           <a:solidFill>
-            <a:srgbClr val="FBECE2"/>
+            <a:srgbClr val="E4EAF3"/>
           </a:solidFill>
           <a:ln>
             <a:noFill/>
@@ -12976,7 +13046,7 @@
           </a:fontRef>
         </p:style>
         <p:txBody>
-          <a:bodyPr rtlCol="0" anchor="ctr" wrap="square" lIns="36576" rIns="36576" tIns="36576" bIns="36576"/>
+          <a:bodyPr rtlCol="0" anchor="ctr" wrap="square" lIns="18288" rIns="18288" tIns="18288" bIns="18288"/>
           <a:lstStyle/>
           <a:p>
             <a:pPr algn="ctr">
@@ -12985,13 +13055,13 @@
               </a:spcAft>
             </a:pPr>
             <a:r>
-              <a:rPr sz="1150" b="1" i="0">
+              <a:rPr sz="1100" b="1" i="0">
                 <a:solidFill>
                   <a:srgbClr val="FFFFFF"/>
                 </a:solidFill>
                 <a:latin typeface="Arial"/>
               </a:rPr>
-              <a:t>Engineer decides</a:t>
+              <a:t>Engineer reviews flagged · all advisory</a:t>
             </a:r>
           </a:p>
         </p:txBody>
@@ -13030,7 +13100,7 @@
                 </a:solidFill>
                 <a:latin typeface="Arial"/>
               </a:rPr>
-              <a:t>Decision shares measured on the held-out SYNTHETIC test lots (2,368 rows).</a:t>
+              <a:t>Decision shares measured on the held-out SYNTHETIC test lots (2,368 part-parameters).</a:t>
             </a:r>
           </a:p>
         </p:txBody>
@@ -13078,7 +13148,7 @@
                 </a:solidFill>
                 <a:latin typeface="Arial"/>
               </a:rPr>
-              <a:t>the QA engineer gets a ranked REVIEW queue — each part with its numbers, its lot, its forecast range and the rule that fired — and records a decision with a reason.</a:t>
+              <a:t>the QA engineer gets a ranked REVIEW queue — each part with its numbers, its lot, its forecast range and the rule that fired — and records a decision with a reason. Decision support, not automation.</a:t>
             </a:r>
           </a:p>
         </p:txBody>
@@ -13131,7 +13201,7 @@
         <p:spPr>
           <a:xfrm>
             <a:off x="365760" y="3675887"/>
-            <a:ext cx="3739896" cy="1225296"/>
+            <a:ext cx="3739896" cy="1188720"/>
           </a:xfrm>
           <a:prstGeom prst="roundRect">
             <a:avLst>
@@ -13201,7 +13271,7 @@
                 </a:solidFill>
                 <a:latin typeface="Arial"/>
               </a:rPr>
-              <a:t>In-spec parts that are abnormal or drifting are surfaced before flight integration. Test lots: 24 of 30 drifting rows flagged at 24 h, vs 4 of 30 by datasheet limits (synthetic).</a:t>
+              <a:t>Latent-defect candidates surface before flight integration, not after: parts in spec but abnormal for their lot or drifting.</a:t>
             </a:r>
           </a:p>
         </p:txBody>
@@ -13215,91 +13285,7 @@
         <p:spPr>
           <a:xfrm>
             <a:off x="4224528" y="3675887"/>
-            <a:ext cx="3739896" cy="1225296"/>
-          </a:xfrm>
-          <a:prstGeom prst="roundRect">
-            <a:avLst>
-              <a:gd name="adj" fmla="val 12000"/>
-            </a:avLst>
-          </a:prstGeom>
-          <a:solidFill>
-            <a:srgbClr val="FBECE2"/>
-          </a:solidFill>
-          <a:ln>
-            <a:noFill/>
-          </a:ln>
-          <a:effectLst/>
-        </p:spPr>
-        <p:style>
-          <a:lnRef idx="1">
-            <a:schemeClr val="accent1"/>
-          </a:lnRef>
-          <a:fillRef idx="3">
-            <a:schemeClr val="accent1"/>
-          </a:fillRef>
-          <a:effectRef idx="2">
-            <a:schemeClr val="accent1"/>
-          </a:effectRef>
-          <a:fontRef idx="minor">
-            <a:schemeClr val="lt1"/>
-          </a:fontRef>
-        </p:style>
-        <p:txBody>
-          <a:bodyPr rtlCol="0" anchor="t" wrap="square" tIns="91440" bIns="91440"/>
-          <a:lstStyle/>
-          <a:p>
-            <a:pPr algn="l">
-              <a:spcAft>
-                <a:spcPts val="300"/>
-              </a:spcAft>
-            </a:pPr>
-            <a:r>
-              <a:rPr sz="1200" b="1" i="0">
-                <a:solidFill>
-                  <a:srgbClr val="C55A11"/>
-                </a:solidFill>
-                <a:latin typeface="Arial"/>
-              </a:rPr>
-              <a:t>CHAMBER TIME</a:t>
-            </a:r>
-            <a:r>
-              <a:rPr sz="1100" b="0" i="1">
-                <a:solidFill>
-                  <a:srgbClr val="595959"/>
-                </a:solidFill>
-                <a:latin typeface="Arial"/>
-              </a:rPr>
-              <a:t>   Economic</a:t>
-            </a:r>
-          </a:p>
-          <a:p>
-            <a:pPr algn="l">
-              <a:spcAft>
-                <a:spcPts val="300"/>
-              </a:spcAft>
-            </a:pPr>
-            <a:r>
-              <a:rPr sz="1200" b="0" i="0">
-                <a:solidFill>
-                  <a:srgbClr val="262626"/>
-                </a:solidFill>
-                <a:latin typeface="Arial"/>
-              </a:rPr>
-              <a:t>A part rejected at 24 h frees 144 of its 168 chamber-hours (86 %). Arithmetic from the PS timeline — not a measured saving.</a:t>
-            </a:r>
-          </a:p>
-        </p:txBody>
-      </p:sp>
-      <p:sp>
-        <p:nvSpPr>
-          <p:cNvPr id="17431" name="Rounded Rectangle 17430"/>
-          <p:cNvSpPr/>
-          <p:nvPr/>
-        </p:nvSpPr>
-        <p:spPr>
-          <a:xfrm>
-            <a:off x="8083296" y="3675887"/>
-            <a:ext cx="3739896" cy="1225296"/>
+            <a:ext cx="3739896" cy="1188720"/>
           </a:xfrm>
           <a:prstGeom prst="roundRect">
             <a:avLst>
@@ -13344,6 +13330,90 @@
                 </a:solidFill>
                 <a:latin typeface="Arial"/>
               </a:rPr>
+              <a:t>FOCUS</a:t>
+            </a:r>
+            <a:r>
+              <a:rPr sz="1100" b="0" i="1">
+                <a:solidFill>
+                  <a:srgbClr val="595959"/>
+                </a:solidFill>
+                <a:latin typeface="Arial"/>
+              </a:rPr>
+              <a:t>   Operational · economic</a:t>
+            </a:r>
+          </a:p>
+          <a:p>
+            <a:pPr algn="l">
+              <a:spcAft>
+                <a:spcPts val="300"/>
+              </a:spcAft>
+            </a:pPr>
+            <a:r>
+              <a:rPr sz="1200" b="0" i="0">
+                <a:solidFill>
+                  <a:srgbClr val="262626"/>
+                </a:solidFill>
+                <a:latin typeface="Arial"/>
+              </a:rPr>
+              <a:t>The 11 % sent to an engineer holds 24 of 30 drifting part-parameters — about 7× the base rate. Attention goes where the risk is.</a:t>
+            </a:r>
+          </a:p>
+        </p:txBody>
+      </p:sp>
+      <p:sp>
+        <p:nvSpPr>
+          <p:cNvPr id="17431" name="Rounded Rectangle 17430"/>
+          <p:cNvSpPr/>
+          <p:nvPr/>
+        </p:nvSpPr>
+        <p:spPr>
+          <a:xfrm>
+            <a:off x="8083296" y="3675887"/>
+            <a:ext cx="3739896" cy="1188720"/>
+          </a:xfrm>
+          <a:prstGeom prst="roundRect">
+            <a:avLst>
+              <a:gd name="adj" fmla="val 12000"/>
+            </a:avLst>
+          </a:prstGeom>
+          <a:solidFill>
+            <a:srgbClr val="E4EAF3"/>
+          </a:solidFill>
+          <a:ln>
+            <a:noFill/>
+          </a:ln>
+          <a:effectLst/>
+        </p:spPr>
+        <p:style>
+          <a:lnRef idx="1">
+            <a:schemeClr val="accent1"/>
+          </a:lnRef>
+          <a:fillRef idx="3">
+            <a:schemeClr val="accent1"/>
+          </a:fillRef>
+          <a:effectRef idx="2">
+            <a:schemeClr val="accent1"/>
+          </a:effectRef>
+          <a:fontRef idx="minor">
+            <a:schemeClr val="lt1"/>
+          </a:fontRef>
+        </p:style>
+        <p:txBody>
+          <a:bodyPr rtlCol="0" anchor="t" wrap="square" tIns="91440" bIns="91440"/>
+          <a:lstStyle/>
+          <a:p>
+            <a:pPr algn="l">
+              <a:spcAft>
+                <a:spcPts val="300"/>
+              </a:spcAft>
+            </a:pPr>
+            <a:r>
+              <a:rPr sz="1200" b="1" i="0">
+                <a:solidFill>
+                  <a:srgbClr val="1F3864"/>
+                </a:solidFill>
+                <a:latin typeface="Arial"/>
+              </a:rPr>
               <a:t>TRUST</a:t>
             </a:r>
             <a:r>
@@ -13382,8 +13452,8 @@
         </p:nvSpPr>
         <p:spPr>
           <a:xfrm>
-            <a:off x="365760" y="5047488"/>
-            <a:ext cx="1280160" cy="658368"/>
+            <a:off x="365760" y="4901184"/>
+            <a:ext cx="11457432" cy="246888"/>
           </a:xfrm>
           <a:prstGeom prst="rect">
             <a:avLst/>
@@ -13391,6 +13461,45 @@
           <a:noFill/>
         </p:spPr>
         <p:txBody>
+          <a:bodyPr wrap="square" anchor="t" lIns="36576" rIns="36576" tIns="36576" bIns="36576">
+            <a:spAutoFit/>
+          </a:bodyPr>
+          <a:lstStyle/>
+          <a:p>
+            <a:pPr algn="ctr">
+              <a:spcAft>
+                <a:spcPts val="0"/>
+              </a:spcAft>
+            </a:pPr>
+            <a:r>
+              <a:rPr sz="1100" b="0" i="0">
+                <a:solidFill>
+                  <a:srgbClr val="595959"/>
+                </a:solidFill>
+                <a:latin typeface="Arial"/>
+              </a:rPr>
+              <a:t>Focus figures: synthetic test lots. Possible chamber-time saving: a confirmed reject could exit 144 h early, if the facility can reload that slot — not measured.</a:t>
+            </a:r>
+          </a:p>
+        </p:txBody>
+      </p:sp>
+      <p:sp>
+        <p:nvSpPr>
+          <p:cNvPr id="17433" name="TextBox 17432"/>
+          <p:cNvSpPr txBox="1"/>
+          <p:nvPr/>
+        </p:nvSpPr>
+        <p:spPr>
+          <a:xfrm>
+            <a:off x="365760" y="5212080"/>
+            <a:ext cx="1280160" cy="658368"/>
+          </a:xfrm>
+          <a:prstGeom prst="rect">
+            <a:avLst/>
+          </a:prstGeom>
+          <a:noFill/>
+        </p:spPr>
+        <p:txBody>
           <a:bodyPr wrap="square" anchor="ctr" lIns="36576" rIns="36576" tIns="36576" bIns="36576">
             <a:spAutoFit/>
           </a:bodyPr>
@@ -13415,14 +13524,14 @@
       </p:sp>
       <p:sp>
         <p:nvSpPr>
-          <p:cNvPr id="17433" name="Pentagon 17432"/>
+          <p:cNvPr id="17434" name="Pentagon 17433"/>
           <p:cNvSpPr/>
           <p:nvPr/>
         </p:nvSpPr>
         <p:spPr>
           <a:xfrm>
-            <a:off x="1691640" y="5029200"/>
-            <a:ext cx="2651760" cy="713232"/>
+            <a:off x="1691640" y="5175504"/>
+            <a:ext cx="2651760" cy="731520"/>
           </a:xfrm>
           <a:prstGeom prst="homePlate">
             <a:avLst/>
@@ -13450,7 +13559,7 @@
           </a:fontRef>
         </p:style>
         <p:txBody>
-          <a:bodyPr rtlCol="0" anchor="ctr" wrap="square" lIns="109728" rIns="109728" tIns="109728" bIns="109728"/>
+          <a:bodyPr rtlCol="0" anchor="ctr" wrap="square" tIns="91440" bIns="91440"/>
           <a:lstStyle/>
           <a:p>
             <a:pPr algn="ctr">
@@ -13488,14 +13597,14 @@
       </p:sp>
       <p:sp>
         <p:nvSpPr>
-          <p:cNvPr id="17434" name="Chevron 17433"/>
+          <p:cNvPr id="17435" name="Chevron 17434"/>
           <p:cNvSpPr/>
           <p:nvPr/>
         </p:nvSpPr>
         <p:spPr>
           <a:xfrm>
-            <a:off x="4233672" y="5029200"/>
-            <a:ext cx="2651760" cy="713232"/>
+            <a:off x="4233672" y="5175504"/>
+            <a:ext cx="2651760" cy="731520"/>
           </a:xfrm>
           <a:prstGeom prst="chevron">
             <a:avLst/>
@@ -13523,7 +13632,7 @@
           </a:fontRef>
         </p:style>
         <p:txBody>
-          <a:bodyPr rtlCol="0" anchor="ctr" wrap="square" lIns="109728" rIns="109728" tIns="109728" bIns="109728"/>
+          <a:bodyPr rtlCol="0" anchor="ctr" wrap="square" tIns="91440" bIns="91440"/>
           <a:lstStyle/>
           <a:p>
             <a:pPr algn="ctr">
@@ -13554,21 +13663,21 @@
                 </a:solidFill>
                 <a:latin typeface="Arial"/>
               </a:rPr>
-              <a:t>ISRO history · gate ≥ 0.90 coverage/lot</a:t>
-            </a:r>
-          </a:p>
-        </p:txBody>
-      </p:sp>
-      <p:sp>
-        <p:nvSpPr>
-          <p:cNvPr id="17435" name="Chevron 17434"/>
+              <a:t>ISRO lot history; go if range holds on ≥ 90 % of lots</a:t>
+            </a:r>
+          </a:p>
+        </p:txBody>
+      </p:sp>
+      <p:sp>
+        <p:nvSpPr>
+          <p:cNvPr id="17436" name="Chevron 17435"/>
           <p:cNvSpPr/>
           <p:nvPr/>
         </p:nvSpPr>
         <p:spPr>
           <a:xfrm>
-            <a:off x="6775704" y="5029200"/>
-            <a:ext cx="2651760" cy="713232"/>
+            <a:off x="6775704" y="5175504"/>
+            <a:ext cx="2651760" cy="731520"/>
           </a:xfrm>
           <a:prstGeom prst="chevron">
             <a:avLst/>
@@ -13596,7 +13705,7 @@
           </a:fontRef>
         </p:style>
         <p:txBody>
-          <a:bodyPr rtlCol="0" anchor="ctr" wrap="square" lIns="109728" rIns="109728" tIns="109728" bIns="109728"/>
+          <a:bodyPr rtlCol="0" anchor="ctr" wrap="square" tIns="91440" bIns="91440"/>
           <a:lstStyle/>
           <a:p>
             <a:pPr algn="ctr">
@@ -13634,14 +13743,14 @@
       </p:sp>
       <p:sp>
         <p:nvSpPr>
-          <p:cNvPr id="17436" name="Chevron 17435"/>
+          <p:cNvPr id="17437" name="Chevron 17436"/>
           <p:cNvSpPr/>
           <p:nvPr/>
         </p:nvSpPr>
         <p:spPr>
           <a:xfrm>
-            <a:off x="9317736" y="5029200"/>
-            <a:ext cx="2651760" cy="713232"/>
+            <a:off x="9317736" y="5175504"/>
+            <a:ext cx="2651760" cy="731520"/>
           </a:xfrm>
           <a:prstGeom prst="chevron">
             <a:avLst/>
@@ -13669,7 +13778,7 @@
           </a:fontRef>
         </p:style>
         <p:txBody>
-          <a:bodyPr rtlCol="0" anchor="ctr" wrap="square" lIns="109728" rIns="109728" tIns="109728" bIns="109728"/>
+          <a:bodyPr rtlCol="0" anchor="ctr" wrap="square" tIns="91440" bIns="91440"/>
           <a:lstStyle/>
           <a:p>
             <a:pPr algn="ctr">
@@ -13700,21 +13809,21 @@
                 </a:solidFill>
                 <a:latin typeface="Arial"/>
               </a:rPr>
-              <a:t>Tester-log ingestion at the rack</a:t>
-            </a:r>
-          </a:p>
-        </p:txBody>
-      </p:sp>
-      <p:sp>
-        <p:nvSpPr>
-          <p:cNvPr id="17437" name="TextBox 17436"/>
+              <a:t>Tester-log ingestion · model monitoring</a:t>
+            </a:r>
+          </a:p>
+        </p:txBody>
+      </p:sp>
+      <p:sp>
+        <p:nvSpPr>
+          <p:cNvPr id="17438" name="TextBox 17437"/>
           <p:cNvSpPr txBox="1"/>
           <p:nvPr/>
         </p:nvSpPr>
         <p:spPr>
           <a:xfrm>
-            <a:off x="365760" y="5852160"/>
-            <a:ext cx="11457432" cy="365760"/>
+            <a:off x="365760" y="5961888"/>
+            <a:ext cx="11457432" cy="310896"/>
           </a:xfrm>
           <a:prstGeom prst="rect">
             <a:avLst/>
@@ -13733,9 +13842,9 @@
               </a:spcAft>
             </a:pPr>
             <a:r>
-              <a:rPr sz="1100" b="1" i="0">
-                <a:solidFill>
-                  <a:srgbClr val="C55A11"/>
+              <a:rPr sz="1150" b="1" i="0">
+                <a:solidFill>
+                  <a:srgbClr val="1F3864"/>
                 </a:solidFill>
                 <a:latin typeface="Arial"/>
               </a:rPr>
@@ -13875,7 +13984,7 @@
                 <a:ea typeface="ＭＳ Ｐゴシック" pitchFamily="1" charset="-128"/>
                 <a:cs typeface="Times New Roman" panose="02020603050405020304" pitchFamily="18" charset="0"/>
               </a:rPr>
-              <a:t>RESEARCH  AND REFERENCES</a:t>
+              <a:t>RESEARCH AND REFERENCES</a:t>
             </a:r>
           </a:p>
         </p:txBody>
@@ -14171,8 +14280,144 @@
         </p:nvSpPr>
         <p:spPr>
           <a:xfrm>
+            <a:off x="365760" y="3749039"/>
+            <a:ext cx="5623560" cy="402336"/>
+          </a:xfrm>
+          <a:prstGeom prst="roundRect">
+            <a:avLst>
+              <a:gd name="adj" fmla="val 12000"/>
+            </a:avLst>
+          </a:prstGeom>
+          <a:solidFill>
+            <a:srgbClr val="F0F0F0"/>
+          </a:solidFill>
+          <a:ln>
+            <a:noFill/>
+          </a:ln>
+          <a:effectLst/>
+        </p:spPr>
+        <p:style>
+          <a:lnRef idx="1">
+            <a:schemeClr val="accent1"/>
+          </a:lnRef>
+          <a:fillRef idx="3">
+            <a:schemeClr val="accent1"/>
+          </a:fillRef>
+          <a:effectRef idx="2">
+            <a:schemeClr val="accent1"/>
+          </a:effectRef>
+          <a:fontRef idx="minor">
+            <a:schemeClr val="lt1"/>
+          </a:fontRef>
+        </p:style>
+        <p:txBody>
+          <a:bodyPr rtlCol="0" anchor="ctr" wrap="square" tIns="91440" bIns="91440"/>
+          <a:lstStyle/>
+          <a:p>
+            <a:pPr algn="l">
+              <a:spcAft>
+                <a:spcPts val="0"/>
+              </a:spcAft>
+            </a:pPr>
+            <a:r>
+              <a:rPr sz="1050" b="1" i="0">
+                <a:solidFill>
+                  <a:srgbClr val="1F3864"/>
+                </a:solidFill>
+                <a:latin typeface="Arial"/>
+              </a:rPr>
+              <a:t>Planned: </a:t>
+            </a:r>
+            <a:r>
+              <a:rPr sz="1050" b="0" i="0">
+                <a:solidFill>
+                  <a:srgbClr val="262626"/>
+                </a:solidFill>
+                <a:latin typeface="Arial"/>
+              </a:rPr>
+              <a:t>methodology check on NASA PCoE MOSFET/IGBT ageing data (external, not ISRO)</a:t>
+            </a:r>
+          </a:p>
+        </p:txBody>
+      </p:sp>
+      <p:sp>
+        <p:nvSpPr>
+          <p:cNvPr id="17412" name="Rounded Rectangle 17411"/>
+          <p:cNvSpPr/>
+          <p:nvPr/>
+        </p:nvSpPr>
+        <p:spPr>
+          <a:xfrm>
+            <a:off x="365760" y="4242816"/>
+            <a:ext cx="5623560" cy="768096"/>
+          </a:xfrm>
+          <a:prstGeom prst="roundRect">
+            <a:avLst>
+              <a:gd name="adj" fmla="val 12000"/>
+            </a:avLst>
+          </a:prstGeom>
+          <a:solidFill>
+            <a:srgbClr val="DDEBF7"/>
+          </a:solidFill>
+          <a:ln>
+            <a:noFill/>
+          </a:ln>
+          <a:effectLst/>
+        </p:spPr>
+        <p:style>
+          <a:lnRef idx="1">
+            <a:schemeClr val="accent1"/>
+          </a:lnRef>
+          <a:fillRef idx="3">
+            <a:schemeClr val="accent1"/>
+          </a:fillRef>
+          <a:effectRef idx="2">
+            <a:schemeClr val="accent1"/>
+          </a:effectRef>
+          <a:fontRef idx="minor">
+            <a:schemeClr val="lt1"/>
+          </a:fontRef>
+        </p:style>
+        <p:txBody>
+          <a:bodyPr rtlCol="0" anchor="ctr" wrap="square" tIns="91440" bIns="91440"/>
+          <a:lstStyle/>
+          <a:p>
+            <a:pPr algn="l">
+              <a:spcAft>
+                <a:spcPts val="0"/>
+              </a:spcAft>
+            </a:pPr>
+            <a:r>
+              <a:rPr sz="1250" b="1" i="0">
+                <a:solidFill>
+                  <a:srgbClr val="1F3864"/>
+                </a:solidFill>
+                <a:latin typeface="Arial"/>
+              </a:rPr>
+              <a:t>What we add to this prior art: </a:t>
+            </a:r>
+            <a:r>
+              <a:rPr sz="1250" b="0" i="0">
+                <a:solidFill>
+                  <a:srgbClr val="262626"/>
+                </a:solidFill>
+                <a:latin typeface="Arial"/>
+              </a:rPr>
+              <a:t>a decision at the 24 h checkpoint (not after burn-in) from lot-relative drift, a calibrated 168 h range, and a REVIEW route with per-part evidence.</a:t>
+            </a:r>
+          </a:p>
+        </p:txBody>
+      </p:sp>
+      <p:sp>
+        <p:nvSpPr>
+          <p:cNvPr id="17413" name="Rounded Rectangle 17412"/>
+          <p:cNvSpPr/>
+          <p:nvPr/>
+        </p:nvSpPr>
+        <p:spPr>
+          <a:xfrm>
             <a:off x="365760" y="1335024"/>
-            <a:ext cx="5623560" cy="1024128"/>
+            <a:ext cx="5623560" cy="749808"/>
           </a:xfrm>
           <a:prstGeom prst="roundRect">
             <a:avLst>
@@ -14236,34 +14481,18 @@
               <a:t>SIH 2026 PS 26170 — AI-Driven Anomaly Detection in Component Burn-In &amp; Screening (ISRO). sih.gov.in/sih2026PS</a:t>
             </a:r>
           </a:p>
-          <a:p>
-            <a:pPr algn="l">
-              <a:spcAft>
-                <a:spcPts val="200"/>
-              </a:spcAft>
-            </a:pPr>
-            <a:r>
-              <a:rPr sz="1100" b="0" i="0">
-                <a:solidFill>
-                  <a:srgbClr val="262626"/>
-                </a:solidFill>
-                <a:latin typeface="Arial"/>
-              </a:rPr>
-              <a:t>SIH 2026 Guidelines; SIH 2026 Idea Presentation Format — sih.gov.in/letters/2026/</a:t>
-            </a:r>
-          </a:p>
-        </p:txBody>
-      </p:sp>
-      <p:sp>
-        <p:nvSpPr>
-          <p:cNvPr id="17412" name="Rounded Rectangle 17411"/>
+        </p:txBody>
+      </p:sp>
+      <p:sp>
+        <p:nvSpPr>
+          <p:cNvPr id="17414" name="Rounded Rectangle 17413"/>
           <p:cNvSpPr/>
           <p:nvPr/>
         </p:nvSpPr>
         <p:spPr>
           <a:xfrm>
-            <a:off x="365760" y="2450592"/>
-            <a:ext cx="5623560" cy="1261872"/>
+            <a:off x="365760" y="2176272"/>
+            <a:ext cx="5623560" cy="1481328"/>
           </a:xfrm>
           <a:prstGeom prst="roundRect">
             <a:avLst>
@@ -14363,121 +14592,14 @@
       </p:sp>
       <p:sp>
         <p:nvSpPr>
-          <p:cNvPr id="17413" name="Rounded Rectangle 17412"/>
+          <p:cNvPr id="17415" name="Rounded Rectangle 17414"/>
           <p:cNvSpPr/>
           <p:nvPr/>
         </p:nvSpPr>
         <p:spPr>
           <a:xfrm>
-            <a:off x="365760" y="3803904"/>
-            <a:ext cx="5623560" cy="1188720"/>
-          </a:xfrm>
-          <a:prstGeom prst="roundRect">
-            <a:avLst>
-              <a:gd name="adj" fmla="val 12000"/>
-            </a:avLst>
-          </a:prstGeom>
-          <a:solidFill>
-            <a:srgbClr val="FBECE2"/>
-          </a:solidFill>
-          <a:ln>
-            <a:noFill/>
-          </a:ln>
-          <a:effectLst/>
-        </p:spPr>
-        <p:style>
-          <a:lnRef idx="1">
-            <a:schemeClr val="accent1"/>
-          </a:lnRef>
-          <a:fillRef idx="3">
-            <a:schemeClr val="accent1"/>
-          </a:fillRef>
-          <a:effectRef idx="2">
-            <a:schemeClr val="accent1"/>
-          </a:effectRef>
-          <a:fontRef idx="minor">
-            <a:schemeClr val="lt1"/>
-          </a:fontRef>
-        </p:style>
-        <p:txBody>
-          <a:bodyPr rtlCol="0" anchor="t" wrap="square" tIns="91440" bIns="91440"/>
-          <a:lstStyle/>
-          <a:p>
-            <a:pPr algn="l">
-              <a:spcAft>
-                <a:spcPts val="200"/>
-              </a:spcAft>
-            </a:pPr>
-            <a:r>
-              <a:rPr sz="1150" b="1" i="0">
-                <a:solidFill>
-                  <a:srgbClr val="C55A11"/>
-                </a:solidFill>
-                <a:latin typeface="Arial"/>
-              </a:rPr>
-              <a:t>DATA  (external public dataset — not SIH/ISRO data)</a:t>
-            </a:r>
-          </a:p>
-          <a:p>
-            <a:pPr algn="l">
-              <a:spcAft>
-                <a:spcPts val="200"/>
-              </a:spcAft>
-            </a:pPr>
-            <a:r>
-              <a:rPr sz="1100" b="0" i="0">
-                <a:solidFill>
-                  <a:srgbClr val="262626"/>
-                </a:solidFill>
-                <a:latin typeface="Arial"/>
-              </a:rPr>
-              <a:t>NASA PCoE Data Repository — MOSFET Thermal Overstress Aging (Celaya, Saxena, Saha, Goebel)</a:t>
-            </a:r>
-          </a:p>
-          <a:p>
-            <a:pPr algn="l">
-              <a:spcAft>
-                <a:spcPts val="200"/>
-              </a:spcAft>
-            </a:pPr>
-            <a:r>
-              <a:rPr sz="1100" b="0" i="0">
-                <a:solidFill>
-                  <a:srgbClr val="262626"/>
-                </a:solidFill>
-                <a:latin typeface="Arial"/>
-              </a:rPr>
-              <a:t>NASA PCoE — IGBT Accelerated Aging (Celaya, Wysocki, Goebel, 2009)</a:t>
-            </a:r>
-          </a:p>
-          <a:p>
-            <a:pPr algn="l">
-              <a:spcAft>
-                <a:spcPts val="200"/>
-              </a:spcAft>
-            </a:pPr>
-            <a:r>
-              <a:rPr sz="1100" b="0" i="0">
-                <a:solidFill>
-                  <a:srgbClr val="262626"/>
-                </a:solidFill>
-                <a:latin typeface="Arial"/>
-              </a:rPr>
-              <a:t>Downloaded and hashed; planned methodology check only — not yet run.</a:t>
-            </a:r>
-          </a:p>
-        </p:txBody>
-      </p:sp>
-      <p:sp>
-        <p:nvSpPr>
-          <p:cNvPr id="17414" name="Rounded Rectangle 17413"/>
-          <p:cNvSpPr/>
-          <p:nvPr/>
-        </p:nvSpPr>
-        <p:spPr>
-          <a:xfrm>
-            <a:off x="6199632" y="1335024"/>
-            <a:ext cx="5623560" cy="1463040"/>
+            <a:off x="6199632" y="3017520"/>
+            <a:ext cx="5623560" cy="2011680"/>
           </a:xfrm>
           <a:prstGeom prst="roundRect">
             <a:avLst>
@@ -14522,7 +14644,7 @@
                 </a:solidFill>
                 <a:latin typeface="Arial"/>
               </a:rPr>
-              <a:t>PRIOR ART</a:t>
+              <a:t>METHOD</a:t>
             </a:r>
           </a:p>
           <a:p>
@@ -14538,7 +14660,7 @@
                 </a:solidFill>
                 <a:latin typeface="Arial"/>
               </a:rPr>
-              <a:t>Burn-in ML: I. Ahmed, P. Baraldi, E. Zio, H. Lewitschnig, Comput. Ind. Eng. 204, 111115, 2025 · doi:10.1016/j.cie.2025.111115</a:t>
+              <a:t>Conformal prediction: J. Lei et al., JASA 113(523), 2018 · doi:10.1080/01621459.2017.1307116</a:t>
             </a:r>
           </a:p>
           <a:p>
@@ -14554,7 +14676,7 @@
                 </a:solidFill>
                 <a:latin typeface="Arial"/>
               </a:rPr>
-              <a:t>Lot health for burn-in: L. Langenberg, R. Pätzold, A. Khalid, ESREL 2023</a:t>
+              <a:t>Grouped (lot) data: R. Dunn, L. Wasserman, A. Ramdas, JASA 118(544), 2023 · doi:10.1080/01621459.2022.2060112</a:t>
             </a:r>
           </a:p>
           <a:p>
@@ -14570,21 +14692,37 @@
                 </a:solidFill>
                 <a:latin typeface="Arial"/>
               </a:rPr>
-              <a:t>Burn-in outliers: US 8,010,310 B2, Method and apparatus for identifying outliers following burn-in testing, 2011</a:t>
-            </a:r>
-          </a:p>
-        </p:txBody>
-      </p:sp>
-      <p:sp>
-        <p:nvSpPr>
-          <p:cNvPr id="17415" name="Rounded Rectangle 17414"/>
+              <a:t>Degradation: C. J. Lu, W. O. Meeker, Technometrics 35(2), 1993 · doi:10.1080/00401706.1993.10485038</a:t>
+            </a:r>
+          </a:p>
+          <a:p>
+            <a:pPr algn="l">
+              <a:spcAft>
+                <a:spcPts val="200"/>
+              </a:spcAft>
+            </a:pPr>
+            <a:r>
+              <a:rPr sz="1100" b="0" i="0">
+                <a:solidFill>
+                  <a:srgbClr val="262626"/>
+                </a:solidFill>
+                <a:latin typeface="Arial"/>
+              </a:rPr>
+              <a:t>Reject option (REVIEW): C. K. Chow, IEEE Trans. Inf. Theory 16(1), 1970 · doi:10.1109/TIT.1970.1054406</a:t>
+            </a:r>
+          </a:p>
+        </p:txBody>
+      </p:sp>
+      <p:sp>
+        <p:nvSpPr>
+          <p:cNvPr id="17416" name="Rounded Rectangle 17415"/>
           <p:cNvSpPr/>
           <p:nvPr/>
         </p:nvSpPr>
         <p:spPr>
           <a:xfrm>
-            <a:off x="6199632" y="2889504"/>
-            <a:ext cx="5623560" cy="2103120"/>
+            <a:off x="6199632" y="1335024"/>
+            <a:ext cx="5623560" cy="1591056"/>
           </a:xfrm>
           <a:prstGeom prst="roundRect">
             <a:avLst>
@@ -14629,7 +14767,7 @@
                 </a:solidFill>
                 <a:latin typeface="Arial"/>
               </a:rPr>
-              <a:t>METHOD</a:t>
+              <a:t>PRIOR ART</a:t>
             </a:r>
           </a:p>
           <a:p>
@@ -14645,7 +14783,7 @@
                 </a:solidFill>
                 <a:latin typeface="Arial"/>
               </a:rPr>
-              <a:t>Conformal prediction: J. Lei et al., JASA 113(523), 2018 · doi:10.1080/01621459.2017.1307116</a:t>
+              <a:t>Burn-in ML: I. Ahmed, P. Baraldi, E. Zio, H. Lewitschnig, Comput. Ind. Eng. 204, 111115, 2025 · doi:10.1016/j.cie.2025.111115</a:t>
             </a:r>
           </a:p>
           <a:p>
@@ -14661,7 +14799,7 @@
                 </a:solidFill>
                 <a:latin typeface="Arial"/>
               </a:rPr>
-              <a:t>Grouped (lot) data: R. Dunn, L. Wasserman, A. Ramdas, JASA 118(544), 2023 · doi:10.1080/01621459.2022.2060112</a:t>
+              <a:t>Lot health for burn-in: L. Langenberg, R. Pätzold, A. Khalid, “Process Data Analysis for Improved Burn-In Strategies Based on Complementary AI Models”, ESREL 2023</a:t>
             </a:r>
           </a:p>
           <a:p>
@@ -14677,37 +14815,21 @@
                 </a:solidFill>
                 <a:latin typeface="Arial"/>
               </a:rPr>
-              <a:t>Degradation modelling: C. J. Lu, W. O. Meeker, Technometrics 35(2), 1993 · doi:10.1080/00401706.1993.10485038</a:t>
-            </a:r>
-          </a:p>
-          <a:p>
-            <a:pPr algn="l">
-              <a:spcAft>
-                <a:spcPts val="200"/>
-              </a:spcAft>
-            </a:pPr>
-            <a:r>
-              <a:rPr sz="1100" b="0" i="0">
-                <a:solidFill>
-                  <a:srgbClr val="262626"/>
-                </a:solidFill>
-                <a:latin typeface="Arial"/>
-              </a:rPr>
-              <a:t>Reject option (REVIEW): C. K. Chow, IEEE Trans. Inf. Theory 16(1), 1970 · doi:10.1109/TIT.1970.1054406</a:t>
-            </a:r>
-          </a:p>
-        </p:txBody>
-      </p:sp>
-      <p:sp>
-        <p:nvSpPr>
-          <p:cNvPr id="17416" name="Rounded Rectangle 17415"/>
+              <a:t>Burn-in outliers: US 8,010,310 B2, Method and apparatus for identifying outliers following burn-in testing, 2011</a:t>
+            </a:r>
+          </a:p>
+        </p:txBody>
+      </p:sp>
+      <p:sp>
+        <p:nvSpPr>
+          <p:cNvPr id="17417" name="Rounded Rectangle 17416"/>
           <p:cNvSpPr/>
           <p:nvPr/>
         </p:nvSpPr>
         <p:spPr>
           <a:xfrm>
-            <a:off x="365760" y="5120640"/>
-            <a:ext cx="11457432" cy="1143000"/>
+            <a:off x="365760" y="5138928"/>
+            <a:ext cx="11457432" cy="1133856"/>
           </a:xfrm>
           <a:prstGeom prst="roundRect">
             <a:avLst>
@@ -14746,7 +14868,7 @@
               </a:spcAft>
             </a:pPr>
             <a:r>
-              <a:rPr sz="1200" b="1" i="0">
+              <a:rPr sz="1250" b="1" i="0">
                 <a:solidFill>
                   <a:srgbClr val="FFFFFF"/>
                 </a:solidFill>
@@ -14762,7 +14884,7 @@
               </a:spcAft>
             </a:pPr>
             <a:r>
-              <a:rPr sz="1200" b="1" i="0">
+              <a:rPr sz="1250" b="1" i="0">
                 <a:solidFill>
                   <a:srgbClr val="FFFFFF"/>
                 </a:solidFill>
@@ -14771,22 +14893,22 @@
               <a:t>Code: </a:t>
             </a:r>
             <a:r>
-              <a:rPr sz="1200" b="1" i="0">
+              <a:rPr sz="1250" b="1" i="0">
                 <a:solidFill>
                   <a:srgbClr val="FFFFFF"/>
                 </a:solidFill>
                 <a:latin typeface="Arial"/>
               </a:rPr>
-              <a:t>github.com/Mrudula211/AgniDrishti</a:t>
-            </a:r>
-            <a:r>
-              <a:rPr sz="1200" b="0" i="0">
+              <a:t>github.com/Mrudula211/AgniDrishti/tree/p1-synthetic-data</a:t>
+            </a:r>
+            <a:r>
+              <a:rPr sz="1250" b="0" i="0">
                 <a:solidFill>
                   <a:srgbClr val="FFFFFF"/>
                 </a:solidFill>
                 <a:latin typeface="Arial"/>
               </a:rPr>
-              <a:t> · branch p1-synthetic-data @ 1f5d29a · 111 automated tests · E1–E6 pre-registered before detector code</a:t>
+              <a:t> · commit 1f5d29a · 111 tests · E1–E6 frozen before test lots were scored once</a:t>
             </a:r>
           </a:p>
           <a:p>
@@ -14796,22 +14918,22 @@
               </a:spcAft>
             </a:pPr>
             <a:r>
-              <a:rPr sz="1200" b="1" i="0">
+              <a:rPr sz="1250" b="1" i="0">
                 <a:solidFill>
                   <a:srgbClr val="FFFFFF"/>
                 </a:solidFill>
                 <a:latin typeface="Arial"/>
               </a:rPr>
-              <a:t>Held-out behaviour families sealed 26 Sep 2026 </a:t>
-            </a:r>
-            <a:r>
-              <a:rPr sz="1200" b="0" i="0">
+              <a:t>Final unseen test: </a:t>
+            </a:r>
+            <a:r>
+              <a:rPr sz="1250" b="0" i="0">
                 <a:solidFill>
                   <a:srgbClr val="FFFFFF"/>
                 </a:solidFill>
                 <a:latin typeface="Arial"/>
               </a:rPr>
-              <a:t>(SHA-256 1a7de276…) before model tuning — the defence against “you detect what you injected”.</a:t>
+              <a:t>two behaviour families sealed 26 Sep 2026 (SHA-256 1a7de276…), not yet opened.</a:t>
             </a:r>
           </a:p>
         </p:txBody>
